--- a/docs/pptx/whole/ritu-linsubhr-sens-anyhosp_10pct.pptx
+++ b/docs/pptx/whole/ritu-linsubhr-sens-anyhosp_10pct.pptx
@@ -2443,7 +2443,7 @@
           </p:nvSpPr>
           <p:spPr>
             <a:xfrm>
-              <a:off x="1165204" y="2073503"/>
+              <a:off x="1166270" y="2073503"/>
               <a:ext cx="0" cy="3649639"/>
             </a:xfrm>
             <a:custGeom>
@@ -2486,7 +2486,7 @@
           </p:nvSpPr>
           <p:spPr>
             <a:xfrm>
-              <a:off x="2068531" y="2073503"/>
+              <a:off x="2068786" y="2073503"/>
               <a:ext cx="0" cy="3649639"/>
             </a:xfrm>
             <a:custGeom>
@@ -2529,7 +2529,7 @@
           </p:nvSpPr>
           <p:spPr>
             <a:xfrm>
-              <a:off x="2971859" y="2073503"/>
+              <a:off x="2971301" y="2073503"/>
               <a:ext cx="0" cy="3649639"/>
             </a:xfrm>
             <a:custGeom>
@@ -2572,7 +2572,7 @@
           </p:nvSpPr>
           <p:spPr>
             <a:xfrm>
-              <a:off x="3875187" y="2073503"/>
+              <a:off x="3873816" y="2073503"/>
               <a:ext cx="0" cy="3649639"/>
             </a:xfrm>
             <a:custGeom>
@@ -2615,7 +2615,7 @@
           </p:nvSpPr>
           <p:spPr>
             <a:xfrm>
-              <a:off x="4778514" y="2073503"/>
+              <a:off x="4776332" y="2073503"/>
               <a:ext cx="0" cy="3649639"/>
             </a:xfrm>
             <a:custGeom>
@@ -2658,7 +2658,7 @@
           </p:nvSpPr>
           <p:spPr>
             <a:xfrm>
-              <a:off x="5681842" y="2073503"/>
+              <a:off x="5678847" y="2073503"/>
               <a:ext cx="0" cy="3649639"/>
             </a:xfrm>
             <a:custGeom>
@@ -2701,7 +2701,7 @@
           </p:nvSpPr>
           <p:spPr>
             <a:xfrm>
-              <a:off x="6585169" y="2073503"/>
+              <a:off x="6581363" y="2073503"/>
               <a:ext cx="0" cy="3649639"/>
             </a:xfrm>
             <a:custGeom>
@@ -2744,7 +2744,7 @@
           </p:nvSpPr>
           <p:spPr>
             <a:xfrm>
-              <a:off x="7488497" y="2073503"/>
+              <a:off x="7483878" y="2073503"/>
               <a:ext cx="0" cy="3649639"/>
             </a:xfrm>
             <a:custGeom>
@@ -2787,7 +2787,7 @@
           </p:nvSpPr>
           <p:spPr>
             <a:xfrm>
-              <a:off x="8391824" y="2073503"/>
+              <a:off x="8386393" y="2073503"/>
               <a:ext cx="0" cy="3649639"/>
             </a:xfrm>
             <a:custGeom>
@@ -3045,7 +3045,7 @@
           </p:nvSpPr>
           <p:spPr>
             <a:xfrm>
-              <a:off x="1616868" y="2073503"/>
+              <a:off x="1617528" y="2073503"/>
               <a:ext cx="0" cy="3649639"/>
             </a:xfrm>
             <a:custGeom>
@@ -3088,7 +3088,7 @@
           </p:nvSpPr>
           <p:spPr>
             <a:xfrm>
-              <a:off x="2520195" y="2073503"/>
+              <a:off x="2520043" y="2073503"/>
               <a:ext cx="0" cy="3649639"/>
             </a:xfrm>
             <a:custGeom>
@@ -3131,7 +3131,7 @@
           </p:nvSpPr>
           <p:spPr>
             <a:xfrm>
-              <a:off x="3423523" y="2073503"/>
+              <a:off x="3422559" y="2073503"/>
               <a:ext cx="0" cy="3649639"/>
             </a:xfrm>
             <a:custGeom>
@@ -3174,7 +3174,7 @@
           </p:nvSpPr>
           <p:spPr>
             <a:xfrm>
-              <a:off x="4326850" y="2073503"/>
+              <a:off x="4325074" y="2073503"/>
               <a:ext cx="0" cy="3649639"/>
             </a:xfrm>
             <a:custGeom>
@@ -3217,7 +3217,7 @@
           </p:nvSpPr>
           <p:spPr>
             <a:xfrm>
-              <a:off x="5230178" y="2073503"/>
+              <a:off x="5227590" y="2073503"/>
               <a:ext cx="0" cy="3649639"/>
             </a:xfrm>
             <a:custGeom>
@@ -3260,7 +3260,7 @@
           </p:nvSpPr>
           <p:spPr>
             <a:xfrm>
-              <a:off x="6133505" y="2073503"/>
+              <a:off x="6130105" y="2073503"/>
               <a:ext cx="0" cy="3649639"/>
             </a:xfrm>
             <a:custGeom>
@@ -3303,7 +3303,7 @@
           </p:nvSpPr>
           <p:spPr>
             <a:xfrm>
-              <a:off x="7036833" y="2073503"/>
+              <a:off x="7032620" y="2073503"/>
               <a:ext cx="0" cy="3649639"/>
             </a:xfrm>
             <a:custGeom>
@@ -3346,7 +3346,7 @@
           </p:nvSpPr>
           <p:spPr>
             <a:xfrm>
-              <a:off x="7940161" y="2073503"/>
+              <a:off x="7935136" y="2073503"/>
               <a:ext cx="0" cy="3649639"/>
             </a:xfrm>
             <a:custGeom>
@@ -3389,612 +3389,612 @@
           </p:nvSpPr>
           <p:spPr>
             <a:xfrm>
-              <a:off x="1172049" y="3811937"/>
-              <a:ext cx="7090630" cy="1333883"/>
+              <a:off x="1172049" y="3868898"/>
+              <a:ext cx="7090630" cy="1283295"/>
             </a:xfrm>
             <a:custGeom>
               <a:avLst/>
               <a:pathLst>
-                <a:path w="7090630" h="1333883">
+                <a:path w="7090630" h="1283295">
                   <a:moveTo>
-                    <a:pt x="0" y="272713"/>
+                    <a:pt x="0" y="194662"/>
                   </a:moveTo>
                   <a:lnTo>
-                    <a:pt x="71622" y="291559"/>
-                  </a:lnTo>
-                  <a:lnTo>
-                    <a:pt x="143245" y="310163"/>
-                  </a:lnTo>
-                  <a:lnTo>
-                    <a:pt x="214867" y="328530"/>
-                  </a:lnTo>
-                  <a:lnTo>
-                    <a:pt x="286490" y="346661"/>
-                  </a:lnTo>
-                  <a:lnTo>
-                    <a:pt x="358112" y="364561"/>
-                  </a:lnTo>
-                  <a:lnTo>
-                    <a:pt x="429735" y="382231"/>
-                  </a:lnTo>
-                  <a:lnTo>
-                    <a:pt x="501357" y="399676"/>
-                  </a:lnTo>
-                  <a:lnTo>
-                    <a:pt x="572980" y="416897"/>
-                  </a:lnTo>
-                  <a:lnTo>
-                    <a:pt x="644602" y="433897"/>
-                  </a:lnTo>
-                  <a:lnTo>
-                    <a:pt x="716225" y="450680"/>
-                  </a:lnTo>
-                  <a:lnTo>
-                    <a:pt x="787847" y="467249"/>
-                  </a:lnTo>
-                  <a:lnTo>
-                    <a:pt x="859470" y="483605"/>
-                  </a:lnTo>
-                  <a:lnTo>
-                    <a:pt x="931092" y="499752"/>
-                  </a:lnTo>
-                  <a:lnTo>
-                    <a:pt x="1002715" y="515692"/>
-                  </a:lnTo>
-                  <a:lnTo>
-                    <a:pt x="1074337" y="531428"/>
-                  </a:lnTo>
-                  <a:lnTo>
-                    <a:pt x="1145960" y="546963"/>
-                  </a:lnTo>
-                  <a:lnTo>
-                    <a:pt x="1217582" y="562299"/>
-                  </a:lnTo>
-                  <a:lnTo>
-                    <a:pt x="1289205" y="577439"/>
-                  </a:lnTo>
-                  <a:lnTo>
-                    <a:pt x="1360827" y="592385"/>
-                  </a:lnTo>
-                  <a:lnTo>
-                    <a:pt x="1432450" y="607140"/>
-                  </a:lnTo>
-                  <a:lnTo>
-                    <a:pt x="1504073" y="621706"/>
-                  </a:lnTo>
-                  <a:lnTo>
-                    <a:pt x="1575695" y="636086"/>
-                  </a:lnTo>
-                  <a:lnTo>
-                    <a:pt x="1647318" y="650281"/>
-                  </a:lnTo>
-                  <a:lnTo>
-                    <a:pt x="1718940" y="664295"/>
-                  </a:lnTo>
-                  <a:lnTo>
-                    <a:pt x="1790563" y="678129"/>
-                  </a:lnTo>
-                  <a:lnTo>
-                    <a:pt x="1862185" y="691787"/>
-                  </a:lnTo>
-                  <a:lnTo>
-                    <a:pt x="1933808" y="705270"/>
-                  </a:lnTo>
-                  <a:lnTo>
-                    <a:pt x="2005430" y="718580"/>
-                  </a:lnTo>
-                  <a:lnTo>
-                    <a:pt x="2077053" y="731720"/>
-                  </a:lnTo>
-                  <a:lnTo>
-                    <a:pt x="2148675" y="744691"/>
-                  </a:lnTo>
-                  <a:lnTo>
-                    <a:pt x="2220298" y="757497"/>
-                  </a:lnTo>
-                  <a:lnTo>
-                    <a:pt x="2291920" y="770139"/>
-                  </a:lnTo>
-                  <a:lnTo>
-                    <a:pt x="2363543" y="782619"/>
-                  </a:lnTo>
-                  <a:lnTo>
-                    <a:pt x="2435165" y="794939"/>
-                  </a:lnTo>
-                  <a:lnTo>
-                    <a:pt x="2506788" y="807101"/>
-                  </a:lnTo>
-                  <a:lnTo>
-                    <a:pt x="2578410" y="819108"/>
-                  </a:lnTo>
-                  <a:lnTo>
-                    <a:pt x="2650033" y="830962"/>
-                  </a:lnTo>
-                  <a:lnTo>
-                    <a:pt x="2721655" y="842663"/>
-                  </a:lnTo>
-                  <a:lnTo>
-                    <a:pt x="2793278" y="854215"/>
-                  </a:lnTo>
-                  <a:lnTo>
-                    <a:pt x="2864901" y="865619"/>
-                  </a:lnTo>
-                  <a:lnTo>
-                    <a:pt x="2936523" y="876877"/>
-                  </a:lnTo>
-                  <a:lnTo>
-                    <a:pt x="3008146" y="887991"/>
-                  </a:lnTo>
-                  <a:lnTo>
-                    <a:pt x="3079768" y="898963"/>
-                  </a:lnTo>
-                  <a:lnTo>
-                    <a:pt x="3151391" y="909794"/>
-                  </a:lnTo>
-                  <a:lnTo>
-                    <a:pt x="3223013" y="910899"/>
-                  </a:lnTo>
-                  <a:lnTo>
-                    <a:pt x="3294636" y="899418"/>
-                  </a:lnTo>
-                  <a:lnTo>
-                    <a:pt x="3366258" y="887779"/>
-                  </a:lnTo>
-                  <a:lnTo>
-                    <a:pt x="3437881" y="875979"/>
-                  </a:lnTo>
-                  <a:lnTo>
-                    <a:pt x="3509503" y="864017"/>
-                  </a:lnTo>
-                  <a:lnTo>
-                    <a:pt x="3581126" y="851891"/>
-                  </a:lnTo>
-                  <a:lnTo>
-                    <a:pt x="3652748" y="839598"/>
-                  </a:lnTo>
-                  <a:lnTo>
-                    <a:pt x="3724371" y="827135"/>
-                  </a:lnTo>
-                  <a:lnTo>
-                    <a:pt x="3795993" y="814502"/>
-                  </a:lnTo>
-                  <a:lnTo>
-                    <a:pt x="3867616" y="801694"/>
-                  </a:lnTo>
-                  <a:lnTo>
-                    <a:pt x="3939238" y="788710"/>
-                  </a:lnTo>
-                  <a:lnTo>
-                    <a:pt x="4010861" y="775547"/>
-                  </a:lnTo>
-                  <a:lnTo>
-                    <a:pt x="4082483" y="762204"/>
-                  </a:lnTo>
-                  <a:lnTo>
-                    <a:pt x="4154106" y="748676"/>
-                  </a:lnTo>
-                  <a:lnTo>
-                    <a:pt x="4225729" y="734963"/>
-                  </a:lnTo>
-                  <a:lnTo>
-                    <a:pt x="4297351" y="721061"/>
-                  </a:lnTo>
-                  <a:lnTo>
-                    <a:pt x="4368974" y="706967"/>
-                  </a:lnTo>
-                  <a:lnTo>
-                    <a:pt x="4440596" y="692680"/>
-                  </a:lnTo>
-                  <a:lnTo>
-                    <a:pt x="4512219" y="678196"/>
-                  </a:lnTo>
-                  <a:lnTo>
-                    <a:pt x="4583841" y="663513"/>
-                  </a:lnTo>
-                  <a:lnTo>
-                    <a:pt x="4655464" y="648627"/>
-                  </a:lnTo>
-                  <a:lnTo>
-                    <a:pt x="4727086" y="633537"/>
-                  </a:lnTo>
-                  <a:lnTo>
-                    <a:pt x="4798709" y="618240"/>
-                  </a:lnTo>
-                  <a:lnTo>
-                    <a:pt x="4870331" y="602731"/>
-                  </a:lnTo>
-                  <a:lnTo>
-                    <a:pt x="4941954" y="587010"/>
-                  </a:lnTo>
-                  <a:lnTo>
-                    <a:pt x="5013576" y="571072"/>
-                  </a:lnTo>
-                  <a:lnTo>
-                    <a:pt x="5085199" y="554914"/>
-                  </a:lnTo>
-                  <a:lnTo>
-                    <a:pt x="5156821" y="538535"/>
-                  </a:lnTo>
-                  <a:lnTo>
-                    <a:pt x="5228444" y="521930"/>
-                  </a:lnTo>
-                  <a:lnTo>
-                    <a:pt x="5300066" y="505097"/>
-                  </a:lnTo>
-                  <a:lnTo>
-                    <a:pt x="5371689" y="488031"/>
-                  </a:lnTo>
-                  <a:lnTo>
-                    <a:pt x="5443311" y="470732"/>
-                  </a:lnTo>
-                  <a:lnTo>
-                    <a:pt x="5514934" y="453194"/>
-                  </a:lnTo>
-                  <a:lnTo>
-                    <a:pt x="5586557" y="435414"/>
-                  </a:lnTo>
-                  <a:lnTo>
-                    <a:pt x="5658179" y="417391"/>
-                  </a:lnTo>
-                  <a:lnTo>
-                    <a:pt x="5729802" y="399119"/>
-                  </a:lnTo>
-                  <a:lnTo>
-                    <a:pt x="5801424" y="380596"/>
-                  </a:lnTo>
-                  <a:lnTo>
-                    <a:pt x="5873047" y="361817"/>
-                  </a:lnTo>
-                  <a:lnTo>
-                    <a:pt x="5944669" y="342781"/>
-                  </a:lnTo>
-                  <a:lnTo>
-                    <a:pt x="6016292" y="323482"/>
-                  </a:lnTo>
-                  <a:lnTo>
-                    <a:pt x="6087914" y="303918"/>
-                  </a:lnTo>
-                  <a:lnTo>
-                    <a:pt x="6159537" y="284085"/>
-                  </a:lnTo>
-                  <a:lnTo>
-                    <a:pt x="6231159" y="263979"/>
-                  </a:lnTo>
-                  <a:lnTo>
-                    <a:pt x="6302782" y="243596"/>
-                  </a:lnTo>
-                  <a:lnTo>
-                    <a:pt x="6374404" y="222933"/>
-                  </a:lnTo>
-                  <a:lnTo>
-                    <a:pt x="6446027" y="201985"/>
-                  </a:lnTo>
-                  <a:lnTo>
-                    <a:pt x="6517649" y="180750"/>
-                  </a:lnTo>
-                  <a:lnTo>
-                    <a:pt x="6589272" y="159222"/>
-                  </a:lnTo>
-                  <a:lnTo>
-                    <a:pt x="6660894" y="137398"/>
-                  </a:lnTo>
-                  <a:lnTo>
-                    <a:pt x="6732517" y="115273"/>
-                  </a:lnTo>
-                  <a:lnTo>
-                    <a:pt x="6804139" y="92844"/>
-                  </a:lnTo>
-                  <a:lnTo>
-                    <a:pt x="6875762" y="70107"/>
-                  </a:lnTo>
-                  <a:lnTo>
-                    <a:pt x="6947385" y="47056"/>
-                  </a:lnTo>
-                  <a:lnTo>
-                    <a:pt x="7019007" y="23689"/>
+                    <a:pt x="71622" y="214222"/>
+                  </a:lnTo>
+                  <a:lnTo>
+                    <a:pt x="143245" y="233526"/>
+                  </a:lnTo>
+                  <a:lnTo>
+                    <a:pt x="214867" y="252577"/>
+                  </a:lnTo>
+                  <a:lnTo>
+                    <a:pt x="286490" y="271379"/>
+                  </a:lnTo>
+                  <a:lnTo>
+                    <a:pt x="358112" y="289934"/>
+                  </a:lnTo>
+                  <a:lnTo>
+                    <a:pt x="429735" y="308247"/>
+                  </a:lnTo>
+                  <a:lnTo>
+                    <a:pt x="501357" y="326319"/>
+                  </a:lnTo>
+                  <a:lnTo>
+                    <a:pt x="572980" y="344155"/>
+                  </a:lnTo>
+                  <a:lnTo>
+                    <a:pt x="644602" y="361758"/>
+                  </a:lnTo>
+                  <a:lnTo>
+                    <a:pt x="716225" y="379129"/>
+                  </a:lnTo>
+                  <a:lnTo>
+                    <a:pt x="787847" y="396274"/>
+                  </a:lnTo>
+                  <a:lnTo>
+                    <a:pt x="859470" y="413194"/>
+                  </a:lnTo>
+                  <a:lnTo>
+                    <a:pt x="931092" y="429892"/>
+                  </a:lnTo>
+                  <a:lnTo>
+                    <a:pt x="1002715" y="446372"/>
+                  </a:lnTo>
+                  <a:lnTo>
+                    <a:pt x="1074337" y="462635"/>
+                  </a:lnTo>
+                  <a:lnTo>
+                    <a:pt x="1145960" y="478686"/>
+                  </a:lnTo>
+                  <a:lnTo>
+                    <a:pt x="1217582" y="494527"/>
+                  </a:lnTo>
+                  <a:lnTo>
+                    <a:pt x="1289205" y="510160"/>
+                  </a:lnTo>
+                  <a:lnTo>
+                    <a:pt x="1360827" y="525589"/>
+                  </a:lnTo>
+                  <a:lnTo>
+                    <a:pt x="1432450" y="540815"/>
+                  </a:lnTo>
+                  <a:lnTo>
+                    <a:pt x="1504073" y="555842"/>
+                  </a:lnTo>
+                  <a:lnTo>
+                    <a:pt x="1575695" y="570673"/>
+                  </a:lnTo>
+                  <a:lnTo>
+                    <a:pt x="1647318" y="585309"/>
+                  </a:lnTo>
+                  <a:lnTo>
+                    <a:pt x="1718940" y="599753"/>
+                  </a:lnTo>
+                  <a:lnTo>
+                    <a:pt x="1790563" y="614008"/>
+                  </a:lnTo>
+                  <a:lnTo>
+                    <a:pt x="1862185" y="628077"/>
+                  </a:lnTo>
+                  <a:lnTo>
+                    <a:pt x="1933808" y="641961"/>
+                  </a:lnTo>
+                  <a:lnTo>
+                    <a:pt x="2005430" y="655664"/>
+                  </a:lnTo>
+                  <a:lnTo>
+                    <a:pt x="2077053" y="669187"/>
+                  </a:lnTo>
+                  <a:lnTo>
+                    <a:pt x="2148675" y="682533"/>
+                  </a:lnTo>
+                  <a:lnTo>
+                    <a:pt x="2220298" y="695704"/>
+                  </a:lnTo>
+                  <a:lnTo>
+                    <a:pt x="2291920" y="708703"/>
+                  </a:lnTo>
+                  <a:lnTo>
+                    <a:pt x="2363543" y="721532"/>
+                  </a:lnTo>
+                  <a:lnTo>
+                    <a:pt x="2435165" y="734192"/>
+                  </a:lnTo>
+                  <a:lnTo>
+                    <a:pt x="2506788" y="746687"/>
+                  </a:lnTo>
+                  <a:lnTo>
+                    <a:pt x="2578410" y="759018"/>
+                  </a:lnTo>
+                  <a:lnTo>
+                    <a:pt x="2650033" y="771188"/>
+                  </a:lnTo>
+                  <a:lnTo>
+                    <a:pt x="2721655" y="783198"/>
+                  </a:lnTo>
+                  <a:lnTo>
+                    <a:pt x="2793278" y="795051"/>
+                  </a:lnTo>
+                  <a:lnTo>
+                    <a:pt x="2864901" y="806749"/>
+                  </a:lnTo>
+                  <a:lnTo>
+                    <a:pt x="2936523" y="818294"/>
+                  </a:lnTo>
+                  <a:lnTo>
+                    <a:pt x="3008146" y="829687"/>
+                  </a:lnTo>
+                  <a:lnTo>
+                    <a:pt x="3079768" y="840932"/>
+                  </a:lnTo>
+                  <a:lnTo>
+                    <a:pt x="3151391" y="852029"/>
+                  </a:lnTo>
+                  <a:lnTo>
+                    <a:pt x="3223013" y="854809"/>
+                  </a:lnTo>
+                  <a:lnTo>
+                    <a:pt x="3294636" y="843843"/>
+                  </a:lnTo>
+                  <a:lnTo>
+                    <a:pt x="3366258" y="832732"/>
+                  </a:lnTo>
+                  <a:lnTo>
+                    <a:pt x="3437881" y="821475"/>
+                  </a:lnTo>
+                  <a:lnTo>
+                    <a:pt x="3509503" y="810069"/>
+                  </a:lnTo>
+                  <a:lnTo>
+                    <a:pt x="3581126" y="798514"/>
+                  </a:lnTo>
+                  <a:lnTo>
+                    <a:pt x="3652748" y="786807"/>
+                  </a:lnTo>
+                  <a:lnTo>
+                    <a:pt x="3724371" y="774946"/>
+                  </a:lnTo>
+                  <a:lnTo>
+                    <a:pt x="3795993" y="762928"/>
+                  </a:lnTo>
+                  <a:lnTo>
+                    <a:pt x="3867616" y="750753"/>
+                  </a:lnTo>
+                  <a:lnTo>
+                    <a:pt x="3939238" y="738417"/>
+                  </a:lnTo>
+                  <a:lnTo>
+                    <a:pt x="4010861" y="725919"/>
+                  </a:lnTo>
+                  <a:lnTo>
+                    <a:pt x="4082483" y="713257"/>
+                  </a:lnTo>
+                  <a:lnTo>
+                    <a:pt x="4154106" y="700428"/>
+                  </a:lnTo>
+                  <a:lnTo>
+                    <a:pt x="4225729" y="687430"/>
+                  </a:lnTo>
+                  <a:lnTo>
+                    <a:pt x="4297351" y="674262"/>
+                  </a:lnTo>
+                  <a:lnTo>
+                    <a:pt x="4368974" y="660920"/>
+                  </a:lnTo>
+                  <a:lnTo>
+                    <a:pt x="4440596" y="647402"/>
+                  </a:lnTo>
+                  <a:lnTo>
+                    <a:pt x="4512219" y="633707"/>
+                  </a:lnTo>
+                  <a:lnTo>
+                    <a:pt x="4583841" y="619831"/>
+                  </a:lnTo>
+                  <a:lnTo>
+                    <a:pt x="4655464" y="605773"/>
+                  </a:lnTo>
+                  <a:lnTo>
+                    <a:pt x="4727086" y="591530"/>
+                  </a:lnTo>
+                  <a:lnTo>
+                    <a:pt x="4798709" y="577100"/>
+                  </a:lnTo>
+                  <a:lnTo>
+                    <a:pt x="4870331" y="562479"/>
+                  </a:lnTo>
+                  <a:lnTo>
+                    <a:pt x="4941954" y="547667"/>
+                  </a:lnTo>
+                  <a:lnTo>
+                    <a:pt x="5013576" y="532659"/>
+                  </a:lnTo>
+                  <a:lnTo>
+                    <a:pt x="5085199" y="517454"/>
+                  </a:lnTo>
+                  <a:lnTo>
+                    <a:pt x="5156821" y="502049"/>
+                  </a:lnTo>
+                  <a:lnTo>
+                    <a:pt x="5228444" y="486442"/>
+                  </a:lnTo>
+                  <a:lnTo>
+                    <a:pt x="5300066" y="470629"/>
+                  </a:lnTo>
+                  <a:lnTo>
+                    <a:pt x="5371689" y="454607"/>
+                  </a:lnTo>
+                  <a:lnTo>
+                    <a:pt x="5443311" y="438376"/>
+                  </a:lnTo>
+                  <a:lnTo>
+                    <a:pt x="5514934" y="421930"/>
+                  </a:lnTo>
+                  <a:lnTo>
+                    <a:pt x="5586557" y="405268"/>
+                  </a:lnTo>
+                  <a:lnTo>
+                    <a:pt x="5658179" y="388387"/>
+                  </a:lnTo>
+                  <a:lnTo>
+                    <a:pt x="5729802" y="371284"/>
+                  </a:lnTo>
+                  <a:lnTo>
+                    <a:pt x="5801424" y="353956"/>
+                  </a:lnTo>
+                  <a:lnTo>
+                    <a:pt x="5873047" y="336400"/>
+                  </a:lnTo>
+                  <a:lnTo>
+                    <a:pt x="5944669" y="318613"/>
+                  </a:lnTo>
+                  <a:lnTo>
+                    <a:pt x="6016292" y="300592"/>
+                  </a:lnTo>
+                  <a:lnTo>
+                    <a:pt x="6087914" y="282334"/>
+                  </a:lnTo>
+                  <a:lnTo>
+                    <a:pt x="6159537" y="263835"/>
+                  </a:lnTo>
+                  <a:lnTo>
+                    <a:pt x="6231159" y="245093"/>
+                  </a:lnTo>
+                  <a:lnTo>
+                    <a:pt x="6302782" y="226105"/>
+                  </a:lnTo>
+                  <a:lnTo>
+                    <a:pt x="6374404" y="206867"/>
+                  </a:lnTo>
+                  <a:lnTo>
+                    <a:pt x="6446027" y="187375"/>
+                  </a:lnTo>
+                  <a:lnTo>
+                    <a:pt x="6517649" y="167628"/>
+                  </a:lnTo>
+                  <a:lnTo>
+                    <a:pt x="6589272" y="147620"/>
+                  </a:lnTo>
+                  <a:lnTo>
+                    <a:pt x="6660894" y="127349"/>
+                  </a:lnTo>
+                  <a:lnTo>
+                    <a:pt x="6732517" y="106812"/>
+                  </a:lnTo>
+                  <a:lnTo>
+                    <a:pt x="6804139" y="86004"/>
+                  </a:lnTo>
+                  <a:lnTo>
+                    <a:pt x="6875762" y="64923"/>
+                  </a:lnTo>
+                  <a:lnTo>
+                    <a:pt x="6947385" y="43564"/>
+                  </a:lnTo>
+                  <a:lnTo>
+                    <a:pt x="7019007" y="21924"/>
                   </a:lnTo>
                   <a:lnTo>
                     <a:pt x="7090630" y="0"/>
                   </a:lnTo>
                   <a:lnTo>
-                    <a:pt x="7090630" y="1333883"/>
-                  </a:lnTo>
-                  <a:lnTo>
-                    <a:pt x="7019007" y="1328549"/>
-                  </a:lnTo>
-                  <a:lnTo>
-                    <a:pt x="6947385" y="1323147"/>
-                  </a:lnTo>
-                  <a:lnTo>
-                    <a:pt x="6875762" y="1317674"/>
-                  </a:lnTo>
-                  <a:lnTo>
-                    <a:pt x="6804139" y="1312130"/>
-                  </a:lnTo>
-                  <a:lnTo>
-                    <a:pt x="6732517" y="1306515"/>
-                  </a:lnTo>
-                  <a:lnTo>
-                    <a:pt x="6660894" y="1300826"/>
-                  </a:lnTo>
-                  <a:lnTo>
-                    <a:pt x="6589272" y="1295064"/>
-                  </a:lnTo>
-                  <a:lnTo>
-                    <a:pt x="6517649" y="1289227"/>
-                  </a:lnTo>
-                  <a:lnTo>
-                    <a:pt x="6446027" y="1283315"/>
-                  </a:lnTo>
-                  <a:lnTo>
-                    <a:pt x="6374404" y="1277326"/>
-                  </a:lnTo>
-                  <a:lnTo>
-                    <a:pt x="6302782" y="1271259"/>
-                  </a:lnTo>
-                  <a:lnTo>
-                    <a:pt x="6231159" y="1265113"/>
-                  </a:lnTo>
-                  <a:lnTo>
-                    <a:pt x="6159537" y="1258888"/>
-                  </a:lnTo>
-                  <a:lnTo>
-                    <a:pt x="6087914" y="1252583"/>
-                  </a:lnTo>
-                  <a:lnTo>
-                    <a:pt x="6016292" y="1246195"/>
-                  </a:lnTo>
-                  <a:lnTo>
-                    <a:pt x="5944669" y="1239725"/>
-                  </a:lnTo>
-                  <a:lnTo>
-                    <a:pt x="5873047" y="1233170"/>
-                  </a:lnTo>
-                  <a:lnTo>
-                    <a:pt x="5801424" y="1226531"/>
-                  </a:lnTo>
-                  <a:lnTo>
-                    <a:pt x="5729802" y="1219806"/>
-                  </a:lnTo>
-                  <a:lnTo>
-                    <a:pt x="5658179" y="1212993"/>
-                  </a:lnTo>
-                  <a:lnTo>
-                    <a:pt x="5586557" y="1206093"/>
-                  </a:lnTo>
-                  <a:lnTo>
-                    <a:pt x="5514934" y="1199102"/>
-                  </a:lnTo>
-                  <a:lnTo>
-                    <a:pt x="5443311" y="1192022"/>
-                  </a:lnTo>
-                  <a:lnTo>
-                    <a:pt x="5371689" y="1184849"/>
-                  </a:lnTo>
-                  <a:lnTo>
-                    <a:pt x="5300066" y="1177583"/>
-                  </a:lnTo>
-                  <a:lnTo>
-                    <a:pt x="5228444" y="1170224"/>
-                  </a:lnTo>
-                  <a:lnTo>
-                    <a:pt x="5156821" y="1162768"/>
-                  </a:lnTo>
-                  <a:lnTo>
-                    <a:pt x="5085199" y="1155217"/>
-                  </a:lnTo>
-                  <a:lnTo>
-                    <a:pt x="5013576" y="1147567"/>
-                  </a:lnTo>
-                  <a:lnTo>
-                    <a:pt x="4941954" y="1139818"/>
-                  </a:lnTo>
-                  <a:lnTo>
-                    <a:pt x="4870331" y="1131968"/>
-                  </a:lnTo>
-                  <a:lnTo>
-                    <a:pt x="4798709" y="1124017"/>
-                  </a:lnTo>
-                  <a:lnTo>
-                    <a:pt x="4727086" y="1115963"/>
-                  </a:lnTo>
-                  <a:lnTo>
-                    <a:pt x="4655464" y="1107805"/>
-                  </a:lnTo>
-                  <a:lnTo>
-                    <a:pt x="4583841" y="1099540"/>
-                  </a:lnTo>
-                  <a:lnTo>
-                    <a:pt x="4512219" y="1091169"/>
-                  </a:lnTo>
-                  <a:lnTo>
-                    <a:pt x="4440596" y="1082689"/>
-                  </a:lnTo>
-                  <a:lnTo>
-                    <a:pt x="4368974" y="1074099"/>
-                  </a:lnTo>
-                  <a:lnTo>
-                    <a:pt x="4297351" y="1065397"/>
-                  </a:lnTo>
-                  <a:lnTo>
-                    <a:pt x="4225729" y="1056583"/>
-                  </a:lnTo>
-                  <a:lnTo>
-                    <a:pt x="4154106" y="1047655"/>
-                  </a:lnTo>
-                  <a:lnTo>
-                    <a:pt x="4082483" y="1038611"/>
-                  </a:lnTo>
-                  <a:lnTo>
-                    <a:pt x="4010861" y="1029449"/>
-                  </a:lnTo>
-                  <a:lnTo>
-                    <a:pt x="3939238" y="1020169"/>
-                  </a:lnTo>
-                  <a:lnTo>
-                    <a:pt x="3867616" y="1010769"/>
-                  </a:lnTo>
-                  <a:lnTo>
-                    <a:pt x="3795993" y="1001246"/>
-                  </a:lnTo>
-                  <a:lnTo>
-                    <a:pt x="3724371" y="991600"/>
-                  </a:lnTo>
-                  <a:lnTo>
-                    <a:pt x="3652748" y="981830"/>
-                  </a:lnTo>
-                  <a:lnTo>
-                    <a:pt x="3581126" y="971932"/>
-                  </a:lnTo>
-                  <a:lnTo>
-                    <a:pt x="3509503" y="961906"/>
-                  </a:lnTo>
-                  <a:lnTo>
-                    <a:pt x="3437881" y="951751"/>
-                  </a:lnTo>
-                  <a:lnTo>
-                    <a:pt x="3366258" y="941463"/>
-                  </a:lnTo>
-                  <a:lnTo>
-                    <a:pt x="3294636" y="931042"/>
-                  </a:lnTo>
-                  <a:lnTo>
-                    <a:pt x="3223013" y="920487"/>
-                  </a:lnTo>
-                  <a:lnTo>
-                    <a:pt x="3151391" y="922225"/>
-                  </a:lnTo>
-                  <a:lnTo>
-                    <a:pt x="3079768" y="933397"/>
-                  </a:lnTo>
-                  <a:lnTo>
-                    <a:pt x="3008146" y="944417"/>
-                  </a:lnTo>
-                  <a:lnTo>
-                    <a:pt x="2936523" y="955287"/>
-                  </a:lnTo>
-                  <a:lnTo>
-                    <a:pt x="2864901" y="966010"/>
-                  </a:lnTo>
-                  <a:lnTo>
-                    <a:pt x="2793278" y="976588"/>
-                  </a:lnTo>
-                  <a:lnTo>
-                    <a:pt x="2721655" y="987022"/>
-                  </a:lnTo>
-                  <a:lnTo>
-                    <a:pt x="2650033" y="997314"/>
-                  </a:lnTo>
-                  <a:lnTo>
-                    <a:pt x="2578410" y="1007466"/>
-                  </a:lnTo>
-                  <a:lnTo>
-                    <a:pt x="2506788" y="1017481"/>
-                  </a:lnTo>
-                  <a:lnTo>
-                    <a:pt x="2435165" y="1027360"/>
-                  </a:lnTo>
-                  <a:lnTo>
-                    <a:pt x="2363543" y="1037105"/>
-                  </a:lnTo>
-                  <a:lnTo>
-                    <a:pt x="2291920" y="1046717"/>
-                  </a:lnTo>
-                  <a:lnTo>
-                    <a:pt x="2220298" y="1056199"/>
-                  </a:lnTo>
-                  <a:lnTo>
-                    <a:pt x="2148675" y="1065553"/>
-                  </a:lnTo>
-                  <a:lnTo>
-                    <a:pt x="2077053" y="1074779"/>
-                  </a:lnTo>
-                  <a:lnTo>
-                    <a:pt x="2005430" y="1083880"/>
-                  </a:lnTo>
-                  <a:lnTo>
-                    <a:pt x="1933808" y="1092858"/>
-                  </a:lnTo>
-                  <a:lnTo>
-                    <a:pt x="1862185" y="1101713"/>
-                  </a:lnTo>
-                  <a:lnTo>
-                    <a:pt x="1790563" y="1110449"/>
-                  </a:lnTo>
-                  <a:lnTo>
-                    <a:pt x="1718940" y="1119066"/>
-                  </a:lnTo>
-                  <a:lnTo>
-                    <a:pt x="1647318" y="1127566"/>
-                  </a:lnTo>
-                  <a:lnTo>
-                    <a:pt x="1575695" y="1135951"/>
-                  </a:lnTo>
-                  <a:lnTo>
-                    <a:pt x="1504073" y="1144221"/>
-                  </a:lnTo>
-                  <a:lnTo>
-                    <a:pt x="1432450" y="1152380"/>
-                  </a:lnTo>
-                  <a:lnTo>
-                    <a:pt x="1360827" y="1160428"/>
-                  </a:lnTo>
-                  <a:lnTo>
-                    <a:pt x="1289205" y="1168367"/>
-                  </a:lnTo>
-                  <a:lnTo>
-                    <a:pt x="1217582" y="1176197"/>
-                  </a:lnTo>
-                  <a:lnTo>
-                    <a:pt x="1145960" y="1183922"/>
-                  </a:lnTo>
-                  <a:lnTo>
-                    <a:pt x="1074337" y="1191542"/>
-                  </a:lnTo>
-                  <a:lnTo>
-                    <a:pt x="1002715" y="1199058"/>
-                  </a:lnTo>
-                  <a:lnTo>
-                    <a:pt x="931092" y="1206472"/>
-                  </a:lnTo>
-                  <a:lnTo>
-                    <a:pt x="859470" y="1213786"/>
-                  </a:lnTo>
-                  <a:lnTo>
-                    <a:pt x="787847" y="1221000"/>
-                  </a:lnTo>
-                  <a:lnTo>
-                    <a:pt x="716225" y="1228117"/>
-                  </a:lnTo>
-                  <a:lnTo>
-                    <a:pt x="644602" y="1235137"/>
-                  </a:lnTo>
-                  <a:lnTo>
-                    <a:pt x="572980" y="1242061"/>
-                  </a:lnTo>
-                  <a:lnTo>
-                    <a:pt x="501357" y="1248892"/>
-                  </a:lnTo>
-                  <a:lnTo>
-                    <a:pt x="429735" y="1255630"/>
-                  </a:lnTo>
-                  <a:lnTo>
-                    <a:pt x="358112" y="1262276"/>
-                  </a:lnTo>
-                  <a:lnTo>
-                    <a:pt x="286490" y="1268833"/>
-                  </a:lnTo>
-                  <a:lnTo>
-                    <a:pt x="214867" y="1275300"/>
-                  </a:lnTo>
-                  <a:lnTo>
-                    <a:pt x="143245" y="1281679"/>
-                  </a:lnTo>
-                  <a:lnTo>
-                    <a:pt x="71622" y="1287972"/>
-                  </a:lnTo>
-                  <a:lnTo>
-                    <a:pt x="0" y="1294180"/>
+                    <a:pt x="7090630" y="1283295"/>
+                  </a:lnTo>
+                  <a:lnTo>
+                    <a:pt x="7019007" y="1277920"/>
+                  </a:lnTo>
+                  <a:lnTo>
+                    <a:pt x="6947385" y="1272474"/>
+                  </a:lnTo>
+                  <a:lnTo>
+                    <a:pt x="6875762" y="1266956"/>
+                  </a:lnTo>
+                  <a:lnTo>
+                    <a:pt x="6804139" y="1261364"/>
+                  </a:lnTo>
+                  <a:lnTo>
+                    <a:pt x="6732517" y="1255699"/>
+                  </a:lnTo>
+                  <a:lnTo>
+                    <a:pt x="6660894" y="1249958"/>
+                  </a:lnTo>
+                  <a:lnTo>
+                    <a:pt x="6589272" y="1244141"/>
+                  </a:lnTo>
+                  <a:lnTo>
+                    <a:pt x="6517649" y="1238247"/>
+                  </a:lnTo>
+                  <a:lnTo>
+                    <a:pt x="6446027" y="1232274"/>
+                  </a:lnTo>
+                  <a:lnTo>
+                    <a:pt x="6374404" y="1226223"/>
+                  </a:lnTo>
+                  <a:lnTo>
+                    <a:pt x="6302782" y="1220091"/>
+                  </a:lnTo>
+                  <a:lnTo>
+                    <a:pt x="6231159" y="1213878"/>
+                  </a:lnTo>
+                  <a:lnTo>
+                    <a:pt x="6159537" y="1207582"/>
+                  </a:lnTo>
+                  <a:lnTo>
+                    <a:pt x="6087914" y="1201203"/>
+                  </a:lnTo>
+                  <a:lnTo>
+                    <a:pt x="6016292" y="1194739"/>
+                  </a:lnTo>
+                  <a:lnTo>
+                    <a:pt x="5944669" y="1188189"/>
+                  </a:lnTo>
+                  <a:lnTo>
+                    <a:pt x="5873047" y="1181552"/>
+                  </a:lnTo>
+                  <a:lnTo>
+                    <a:pt x="5801424" y="1174828"/>
+                  </a:lnTo>
+                  <a:lnTo>
+                    <a:pt x="5729802" y="1168014"/>
+                  </a:lnTo>
+                  <a:lnTo>
+                    <a:pt x="5658179" y="1161110"/>
+                  </a:lnTo>
+                  <a:lnTo>
+                    <a:pt x="5586557" y="1154114"/>
+                  </a:lnTo>
+                  <a:lnTo>
+                    <a:pt x="5514934" y="1147025"/>
+                  </a:lnTo>
+                  <a:lnTo>
+                    <a:pt x="5443311" y="1139842"/>
+                  </a:lnTo>
+                  <a:lnTo>
+                    <a:pt x="5371689" y="1132564"/>
+                  </a:lnTo>
+                  <a:lnTo>
+                    <a:pt x="5300066" y="1125190"/>
+                  </a:lnTo>
+                  <a:lnTo>
+                    <a:pt x="5228444" y="1117717"/>
+                  </a:lnTo>
+                  <a:lnTo>
+                    <a:pt x="5156821" y="1110145"/>
+                  </a:lnTo>
+                  <a:lnTo>
+                    <a:pt x="5085199" y="1102473"/>
+                  </a:lnTo>
+                  <a:lnTo>
+                    <a:pt x="5013576" y="1094699"/>
+                  </a:lnTo>
+                  <a:lnTo>
+                    <a:pt x="4941954" y="1086822"/>
+                  </a:lnTo>
+                  <a:lnTo>
+                    <a:pt x="4870331" y="1078841"/>
+                  </a:lnTo>
+                  <a:lnTo>
+                    <a:pt x="4798709" y="1070753"/>
+                  </a:lnTo>
+                  <a:lnTo>
+                    <a:pt x="4727086" y="1062558"/>
+                  </a:lnTo>
+                  <a:lnTo>
+                    <a:pt x="4655464" y="1054255"/>
+                  </a:lnTo>
+                  <a:lnTo>
+                    <a:pt x="4583841" y="1045841"/>
+                  </a:lnTo>
+                  <a:lnTo>
+                    <a:pt x="4512219" y="1037316"/>
+                  </a:lnTo>
+                  <a:lnTo>
+                    <a:pt x="4440596" y="1028677"/>
+                  </a:lnTo>
+                  <a:lnTo>
+                    <a:pt x="4368974" y="1019924"/>
+                  </a:lnTo>
+                  <a:lnTo>
+                    <a:pt x="4297351" y="1011055"/>
+                  </a:lnTo>
+                  <a:lnTo>
+                    <a:pt x="4225729" y="1002068"/>
+                  </a:lnTo>
+                  <a:lnTo>
+                    <a:pt x="4154106" y="992962"/>
+                  </a:lnTo>
+                  <a:lnTo>
+                    <a:pt x="4082483" y="983735"/>
+                  </a:lnTo>
+                  <a:lnTo>
+                    <a:pt x="4010861" y="974385"/>
+                  </a:lnTo>
+                  <a:lnTo>
+                    <a:pt x="3939238" y="964912"/>
+                  </a:lnTo>
+                  <a:lnTo>
+                    <a:pt x="3867616" y="955313"/>
+                  </a:lnTo>
+                  <a:lnTo>
+                    <a:pt x="3795993" y="945586"/>
+                  </a:lnTo>
+                  <a:lnTo>
+                    <a:pt x="3724371" y="935730"/>
+                  </a:lnTo>
+                  <a:lnTo>
+                    <a:pt x="3652748" y="925744"/>
+                  </a:lnTo>
+                  <a:lnTo>
+                    <a:pt x="3581126" y="915625"/>
+                  </a:lnTo>
+                  <a:lnTo>
+                    <a:pt x="3509503" y="905372"/>
+                  </a:lnTo>
+                  <a:lnTo>
+                    <a:pt x="3437881" y="894983"/>
+                  </a:lnTo>
+                  <a:lnTo>
+                    <a:pt x="3366258" y="884456"/>
+                  </a:lnTo>
+                  <a:lnTo>
+                    <a:pt x="3294636" y="873789"/>
+                  </a:lnTo>
+                  <a:lnTo>
+                    <a:pt x="3223013" y="862980"/>
+                  </a:lnTo>
+                  <a:lnTo>
+                    <a:pt x="3151391" y="865633"/>
+                  </a:lnTo>
+                  <a:lnTo>
+                    <a:pt x="3079768" y="876317"/>
+                  </a:lnTo>
+                  <a:lnTo>
+                    <a:pt x="3008146" y="886862"/>
+                  </a:lnTo>
+                  <a:lnTo>
+                    <a:pt x="2936523" y="897270"/>
+                  </a:lnTo>
+                  <a:lnTo>
+                    <a:pt x="2864901" y="907543"/>
+                  </a:lnTo>
+                  <a:lnTo>
+                    <a:pt x="2793278" y="917682"/>
+                  </a:lnTo>
+                  <a:lnTo>
+                    <a:pt x="2721655" y="927690"/>
+                  </a:lnTo>
+                  <a:lnTo>
+                    <a:pt x="2650033" y="937567"/>
+                  </a:lnTo>
+                  <a:lnTo>
+                    <a:pt x="2578410" y="947317"/>
+                  </a:lnTo>
+                  <a:lnTo>
+                    <a:pt x="2506788" y="956940"/>
+                  </a:lnTo>
+                  <a:lnTo>
+                    <a:pt x="2435165" y="966438"/>
+                  </a:lnTo>
+                  <a:lnTo>
+                    <a:pt x="2363543" y="975812"/>
+                  </a:lnTo>
+                  <a:lnTo>
+                    <a:pt x="2291920" y="985065"/>
+                  </a:lnTo>
+                  <a:lnTo>
+                    <a:pt x="2220298" y="994198"/>
+                  </a:lnTo>
+                  <a:lnTo>
+                    <a:pt x="2148675" y="1003212"/>
+                  </a:lnTo>
+                  <a:lnTo>
+                    <a:pt x="2077053" y="1012109"/>
+                  </a:lnTo>
+                  <a:lnTo>
+                    <a:pt x="2005430" y="1020891"/>
+                  </a:lnTo>
+                  <a:lnTo>
+                    <a:pt x="1933808" y="1029558"/>
+                  </a:lnTo>
+                  <a:lnTo>
+                    <a:pt x="1862185" y="1038113"/>
+                  </a:lnTo>
+                  <a:lnTo>
+                    <a:pt x="1790563" y="1046557"/>
+                  </a:lnTo>
+                  <a:lnTo>
+                    <a:pt x="1718940" y="1054891"/>
+                  </a:lnTo>
+                  <a:lnTo>
+                    <a:pt x="1647318" y="1063117"/>
+                  </a:lnTo>
+                  <a:lnTo>
+                    <a:pt x="1575695" y="1071236"/>
+                  </a:lnTo>
+                  <a:lnTo>
+                    <a:pt x="1504073" y="1079250"/>
+                  </a:lnTo>
+                  <a:lnTo>
+                    <a:pt x="1432450" y="1087159"/>
+                  </a:lnTo>
+                  <a:lnTo>
+                    <a:pt x="1360827" y="1094966"/>
+                  </a:lnTo>
+                  <a:lnTo>
+                    <a:pt x="1289205" y="1102672"/>
+                  </a:lnTo>
+                  <a:lnTo>
+                    <a:pt x="1217582" y="1110277"/>
+                  </a:lnTo>
+                  <a:lnTo>
+                    <a:pt x="1145960" y="1117784"/>
+                  </a:lnTo>
+                  <a:lnTo>
+                    <a:pt x="1074337" y="1125193"/>
+                  </a:lnTo>
+                  <a:lnTo>
+                    <a:pt x="1002715" y="1132506"/>
+                  </a:lnTo>
+                  <a:lnTo>
+                    <a:pt x="931092" y="1139724"/>
+                  </a:lnTo>
+                  <a:lnTo>
+                    <a:pt x="859470" y="1146849"/>
+                  </a:lnTo>
+                  <a:lnTo>
+                    <a:pt x="787847" y="1153881"/>
+                  </a:lnTo>
+                  <a:lnTo>
+                    <a:pt x="716225" y="1160821"/>
+                  </a:lnTo>
+                  <a:lnTo>
+                    <a:pt x="644602" y="1167672"/>
+                  </a:lnTo>
+                  <a:lnTo>
+                    <a:pt x="572980" y="1174433"/>
+                  </a:lnTo>
+                  <a:lnTo>
+                    <a:pt x="501357" y="1181107"/>
+                  </a:lnTo>
+                  <a:lnTo>
+                    <a:pt x="429735" y="1187694"/>
+                  </a:lnTo>
+                  <a:lnTo>
+                    <a:pt x="358112" y="1194195"/>
+                  </a:lnTo>
+                  <a:lnTo>
+                    <a:pt x="286490" y="1200612"/>
+                  </a:lnTo>
+                  <a:lnTo>
+                    <a:pt x="214867" y="1206946"/>
+                  </a:lnTo>
+                  <a:lnTo>
+                    <a:pt x="143245" y="1213197"/>
+                  </a:lnTo>
+                  <a:lnTo>
+                    <a:pt x="71622" y="1219367"/>
+                  </a:lnTo>
+                  <a:lnTo>
+                    <a:pt x="0" y="1225457"/>
                   </a:lnTo>
                   <a:close/>
                 </a:path>
@@ -4020,309 +4020,309 @@
           </p:nvSpPr>
           <p:spPr>
             <a:xfrm>
-              <a:off x="1172049" y="3811937"/>
-              <a:ext cx="7090630" cy="910899"/>
+              <a:off x="1172049" y="3868898"/>
+              <a:ext cx="7090630" cy="854809"/>
             </a:xfrm>
             <a:custGeom>
               <a:avLst/>
               <a:pathLst>
-                <a:path w="7090630" h="910899">
+                <a:path w="7090630" h="854809">
                   <a:moveTo>
-                    <a:pt x="0" y="272713"/>
+                    <a:pt x="0" y="194662"/>
                   </a:moveTo>
                   <a:lnTo>
-                    <a:pt x="71622" y="291559"/>
-                  </a:lnTo>
-                  <a:lnTo>
-                    <a:pt x="143245" y="310163"/>
-                  </a:lnTo>
-                  <a:lnTo>
-                    <a:pt x="214867" y="328530"/>
-                  </a:lnTo>
-                  <a:lnTo>
-                    <a:pt x="286490" y="346661"/>
-                  </a:lnTo>
-                  <a:lnTo>
-                    <a:pt x="358112" y="364561"/>
-                  </a:lnTo>
-                  <a:lnTo>
-                    <a:pt x="429735" y="382231"/>
-                  </a:lnTo>
-                  <a:lnTo>
-                    <a:pt x="501357" y="399676"/>
-                  </a:lnTo>
-                  <a:lnTo>
-                    <a:pt x="572980" y="416897"/>
-                  </a:lnTo>
-                  <a:lnTo>
-                    <a:pt x="644602" y="433897"/>
-                  </a:lnTo>
-                  <a:lnTo>
-                    <a:pt x="716225" y="450680"/>
-                  </a:lnTo>
-                  <a:lnTo>
-                    <a:pt x="787847" y="467249"/>
-                  </a:lnTo>
-                  <a:lnTo>
-                    <a:pt x="859470" y="483605"/>
-                  </a:lnTo>
-                  <a:lnTo>
-                    <a:pt x="931092" y="499752"/>
-                  </a:lnTo>
-                  <a:lnTo>
-                    <a:pt x="1002715" y="515692"/>
-                  </a:lnTo>
-                  <a:lnTo>
-                    <a:pt x="1074337" y="531428"/>
-                  </a:lnTo>
-                  <a:lnTo>
-                    <a:pt x="1145960" y="546963"/>
-                  </a:lnTo>
-                  <a:lnTo>
-                    <a:pt x="1217582" y="562299"/>
-                  </a:lnTo>
-                  <a:lnTo>
-                    <a:pt x="1289205" y="577439"/>
-                  </a:lnTo>
-                  <a:lnTo>
-                    <a:pt x="1360827" y="592385"/>
-                  </a:lnTo>
-                  <a:lnTo>
-                    <a:pt x="1432450" y="607140"/>
-                  </a:lnTo>
-                  <a:lnTo>
-                    <a:pt x="1504073" y="621706"/>
-                  </a:lnTo>
-                  <a:lnTo>
-                    <a:pt x="1575695" y="636086"/>
-                  </a:lnTo>
-                  <a:lnTo>
-                    <a:pt x="1647318" y="650281"/>
-                  </a:lnTo>
-                  <a:lnTo>
-                    <a:pt x="1718940" y="664295"/>
-                  </a:lnTo>
-                  <a:lnTo>
-                    <a:pt x="1790563" y="678129"/>
-                  </a:lnTo>
-                  <a:lnTo>
-                    <a:pt x="1862185" y="691787"/>
-                  </a:lnTo>
-                  <a:lnTo>
-                    <a:pt x="1933808" y="705270"/>
-                  </a:lnTo>
-                  <a:lnTo>
-                    <a:pt x="2005430" y="718580"/>
-                  </a:lnTo>
-                  <a:lnTo>
-                    <a:pt x="2077053" y="731720"/>
-                  </a:lnTo>
-                  <a:lnTo>
-                    <a:pt x="2148675" y="744691"/>
-                  </a:lnTo>
-                  <a:lnTo>
-                    <a:pt x="2220298" y="757497"/>
-                  </a:lnTo>
-                  <a:lnTo>
-                    <a:pt x="2291920" y="770139"/>
-                  </a:lnTo>
-                  <a:lnTo>
-                    <a:pt x="2363543" y="782619"/>
-                  </a:lnTo>
-                  <a:lnTo>
-                    <a:pt x="2435165" y="794939"/>
-                  </a:lnTo>
-                  <a:lnTo>
-                    <a:pt x="2506788" y="807101"/>
-                  </a:lnTo>
-                  <a:lnTo>
-                    <a:pt x="2578410" y="819108"/>
-                  </a:lnTo>
-                  <a:lnTo>
-                    <a:pt x="2650033" y="830962"/>
-                  </a:lnTo>
-                  <a:lnTo>
-                    <a:pt x="2721655" y="842663"/>
-                  </a:lnTo>
-                  <a:lnTo>
-                    <a:pt x="2793278" y="854215"/>
-                  </a:lnTo>
-                  <a:lnTo>
-                    <a:pt x="2864901" y="865619"/>
-                  </a:lnTo>
-                  <a:lnTo>
-                    <a:pt x="2936523" y="876877"/>
-                  </a:lnTo>
-                  <a:lnTo>
-                    <a:pt x="3008146" y="887991"/>
-                  </a:lnTo>
-                  <a:lnTo>
-                    <a:pt x="3079768" y="898963"/>
-                  </a:lnTo>
-                  <a:lnTo>
-                    <a:pt x="3151391" y="909794"/>
-                  </a:lnTo>
-                  <a:lnTo>
-                    <a:pt x="3223013" y="910899"/>
-                  </a:lnTo>
-                  <a:lnTo>
-                    <a:pt x="3294636" y="899418"/>
-                  </a:lnTo>
-                  <a:lnTo>
-                    <a:pt x="3366258" y="887779"/>
-                  </a:lnTo>
-                  <a:lnTo>
-                    <a:pt x="3437881" y="875979"/>
-                  </a:lnTo>
-                  <a:lnTo>
-                    <a:pt x="3509503" y="864017"/>
-                  </a:lnTo>
-                  <a:lnTo>
-                    <a:pt x="3581126" y="851891"/>
-                  </a:lnTo>
-                  <a:lnTo>
-                    <a:pt x="3652748" y="839598"/>
-                  </a:lnTo>
-                  <a:lnTo>
-                    <a:pt x="3724371" y="827135"/>
-                  </a:lnTo>
-                  <a:lnTo>
-                    <a:pt x="3795993" y="814502"/>
-                  </a:lnTo>
-                  <a:lnTo>
-                    <a:pt x="3867616" y="801694"/>
-                  </a:lnTo>
-                  <a:lnTo>
-                    <a:pt x="3939238" y="788710"/>
-                  </a:lnTo>
-                  <a:lnTo>
-                    <a:pt x="4010861" y="775547"/>
-                  </a:lnTo>
-                  <a:lnTo>
-                    <a:pt x="4082483" y="762204"/>
-                  </a:lnTo>
-                  <a:lnTo>
-                    <a:pt x="4154106" y="748676"/>
-                  </a:lnTo>
-                  <a:lnTo>
-                    <a:pt x="4225729" y="734963"/>
-                  </a:lnTo>
-                  <a:lnTo>
-                    <a:pt x="4297351" y="721061"/>
-                  </a:lnTo>
-                  <a:lnTo>
-                    <a:pt x="4368974" y="706967"/>
-                  </a:lnTo>
-                  <a:lnTo>
-                    <a:pt x="4440596" y="692680"/>
-                  </a:lnTo>
-                  <a:lnTo>
-                    <a:pt x="4512219" y="678196"/>
-                  </a:lnTo>
-                  <a:lnTo>
-                    <a:pt x="4583841" y="663513"/>
-                  </a:lnTo>
-                  <a:lnTo>
-                    <a:pt x="4655464" y="648627"/>
-                  </a:lnTo>
-                  <a:lnTo>
-                    <a:pt x="4727086" y="633537"/>
-                  </a:lnTo>
-                  <a:lnTo>
-                    <a:pt x="4798709" y="618240"/>
-                  </a:lnTo>
-                  <a:lnTo>
-                    <a:pt x="4870331" y="602731"/>
-                  </a:lnTo>
-                  <a:lnTo>
-                    <a:pt x="4941954" y="587010"/>
-                  </a:lnTo>
-                  <a:lnTo>
-                    <a:pt x="5013576" y="571072"/>
-                  </a:lnTo>
-                  <a:lnTo>
-                    <a:pt x="5085199" y="554914"/>
-                  </a:lnTo>
-                  <a:lnTo>
-                    <a:pt x="5156821" y="538535"/>
-                  </a:lnTo>
-                  <a:lnTo>
-                    <a:pt x="5228444" y="521930"/>
-                  </a:lnTo>
-                  <a:lnTo>
-                    <a:pt x="5300066" y="505097"/>
-                  </a:lnTo>
-                  <a:lnTo>
-                    <a:pt x="5371689" y="488031"/>
-                  </a:lnTo>
-                  <a:lnTo>
-                    <a:pt x="5443311" y="470732"/>
-                  </a:lnTo>
-                  <a:lnTo>
-                    <a:pt x="5514934" y="453194"/>
-                  </a:lnTo>
-                  <a:lnTo>
-                    <a:pt x="5586557" y="435414"/>
-                  </a:lnTo>
-                  <a:lnTo>
-                    <a:pt x="5658179" y="417391"/>
-                  </a:lnTo>
-                  <a:lnTo>
-                    <a:pt x="5729802" y="399119"/>
-                  </a:lnTo>
-                  <a:lnTo>
-                    <a:pt x="5801424" y="380596"/>
-                  </a:lnTo>
-                  <a:lnTo>
-                    <a:pt x="5873047" y="361817"/>
-                  </a:lnTo>
-                  <a:lnTo>
-                    <a:pt x="5944669" y="342781"/>
-                  </a:lnTo>
-                  <a:lnTo>
-                    <a:pt x="6016292" y="323482"/>
-                  </a:lnTo>
-                  <a:lnTo>
-                    <a:pt x="6087914" y="303918"/>
-                  </a:lnTo>
-                  <a:lnTo>
-                    <a:pt x="6159537" y="284085"/>
-                  </a:lnTo>
-                  <a:lnTo>
-                    <a:pt x="6231159" y="263979"/>
-                  </a:lnTo>
-                  <a:lnTo>
-                    <a:pt x="6302782" y="243596"/>
-                  </a:lnTo>
-                  <a:lnTo>
-                    <a:pt x="6374404" y="222933"/>
-                  </a:lnTo>
-                  <a:lnTo>
-                    <a:pt x="6446027" y="201985"/>
-                  </a:lnTo>
-                  <a:lnTo>
-                    <a:pt x="6517649" y="180750"/>
-                  </a:lnTo>
-                  <a:lnTo>
-                    <a:pt x="6589272" y="159222"/>
-                  </a:lnTo>
-                  <a:lnTo>
-                    <a:pt x="6660894" y="137398"/>
-                  </a:lnTo>
-                  <a:lnTo>
-                    <a:pt x="6732517" y="115273"/>
-                  </a:lnTo>
-                  <a:lnTo>
-                    <a:pt x="6804139" y="92844"/>
-                  </a:lnTo>
-                  <a:lnTo>
-                    <a:pt x="6875762" y="70107"/>
-                  </a:lnTo>
-                  <a:lnTo>
-                    <a:pt x="6947385" y="47056"/>
-                  </a:lnTo>
-                  <a:lnTo>
-                    <a:pt x="7019007" y="23689"/>
+                    <a:pt x="71622" y="214222"/>
+                  </a:lnTo>
+                  <a:lnTo>
+                    <a:pt x="143245" y="233526"/>
+                  </a:lnTo>
+                  <a:lnTo>
+                    <a:pt x="214867" y="252577"/>
+                  </a:lnTo>
+                  <a:lnTo>
+                    <a:pt x="286490" y="271379"/>
+                  </a:lnTo>
+                  <a:lnTo>
+                    <a:pt x="358112" y="289934"/>
+                  </a:lnTo>
+                  <a:lnTo>
+                    <a:pt x="429735" y="308247"/>
+                  </a:lnTo>
+                  <a:lnTo>
+                    <a:pt x="501357" y="326319"/>
+                  </a:lnTo>
+                  <a:lnTo>
+                    <a:pt x="572980" y="344155"/>
+                  </a:lnTo>
+                  <a:lnTo>
+                    <a:pt x="644602" y="361758"/>
+                  </a:lnTo>
+                  <a:lnTo>
+                    <a:pt x="716225" y="379129"/>
+                  </a:lnTo>
+                  <a:lnTo>
+                    <a:pt x="787847" y="396274"/>
+                  </a:lnTo>
+                  <a:lnTo>
+                    <a:pt x="859470" y="413194"/>
+                  </a:lnTo>
+                  <a:lnTo>
+                    <a:pt x="931092" y="429892"/>
+                  </a:lnTo>
+                  <a:lnTo>
+                    <a:pt x="1002715" y="446372"/>
+                  </a:lnTo>
+                  <a:lnTo>
+                    <a:pt x="1074337" y="462635"/>
+                  </a:lnTo>
+                  <a:lnTo>
+                    <a:pt x="1145960" y="478686"/>
+                  </a:lnTo>
+                  <a:lnTo>
+                    <a:pt x="1217582" y="494527"/>
+                  </a:lnTo>
+                  <a:lnTo>
+                    <a:pt x="1289205" y="510160"/>
+                  </a:lnTo>
+                  <a:lnTo>
+                    <a:pt x="1360827" y="525589"/>
+                  </a:lnTo>
+                  <a:lnTo>
+                    <a:pt x="1432450" y="540815"/>
+                  </a:lnTo>
+                  <a:lnTo>
+                    <a:pt x="1504073" y="555842"/>
+                  </a:lnTo>
+                  <a:lnTo>
+                    <a:pt x="1575695" y="570673"/>
+                  </a:lnTo>
+                  <a:lnTo>
+                    <a:pt x="1647318" y="585309"/>
+                  </a:lnTo>
+                  <a:lnTo>
+                    <a:pt x="1718940" y="599753"/>
+                  </a:lnTo>
+                  <a:lnTo>
+                    <a:pt x="1790563" y="614008"/>
+                  </a:lnTo>
+                  <a:lnTo>
+                    <a:pt x="1862185" y="628077"/>
+                  </a:lnTo>
+                  <a:lnTo>
+                    <a:pt x="1933808" y="641961"/>
+                  </a:lnTo>
+                  <a:lnTo>
+                    <a:pt x="2005430" y="655664"/>
+                  </a:lnTo>
+                  <a:lnTo>
+                    <a:pt x="2077053" y="669187"/>
+                  </a:lnTo>
+                  <a:lnTo>
+                    <a:pt x="2148675" y="682533"/>
+                  </a:lnTo>
+                  <a:lnTo>
+                    <a:pt x="2220298" y="695704"/>
+                  </a:lnTo>
+                  <a:lnTo>
+                    <a:pt x="2291920" y="708703"/>
+                  </a:lnTo>
+                  <a:lnTo>
+                    <a:pt x="2363543" y="721532"/>
+                  </a:lnTo>
+                  <a:lnTo>
+                    <a:pt x="2435165" y="734192"/>
+                  </a:lnTo>
+                  <a:lnTo>
+                    <a:pt x="2506788" y="746687"/>
+                  </a:lnTo>
+                  <a:lnTo>
+                    <a:pt x="2578410" y="759018"/>
+                  </a:lnTo>
+                  <a:lnTo>
+                    <a:pt x="2650033" y="771188"/>
+                  </a:lnTo>
+                  <a:lnTo>
+                    <a:pt x="2721655" y="783198"/>
+                  </a:lnTo>
+                  <a:lnTo>
+                    <a:pt x="2793278" y="795051"/>
+                  </a:lnTo>
+                  <a:lnTo>
+                    <a:pt x="2864901" y="806749"/>
+                  </a:lnTo>
+                  <a:lnTo>
+                    <a:pt x="2936523" y="818294"/>
+                  </a:lnTo>
+                  <a:lnTo>
+                    <a:pt x="3008146" y="829687"/>
+                  </a:lnTo>
+                  <a:lnTo>
+                    <a:pt x="3079768" y="840932"/>
+                  </a:lnTo>
+                  <a:lnTo>
+                    <a:pt x="3151391" y="852029"/>
+                  </a:lnTo>
+                  <a:lnTo>
+                    <a:pt x="3223013" y="854809"/>
+                  </a:lnTo>
+                  <a:lnTo>
+                    <a:pt x="3294636" y="843843"/>
+                  </a:lnTo>
+                  <a:lnTo>
+                    <a:pt x="3366258" y="832732"/>
+                  </a:lnTo>
+                  <a:lnTo>
+                    <a:pt x="3437881" y="821475"/>
+                  </a:lnTo>
+                  <a:lnTo>
+                    <a:pt x="3509503" y="810069"/>
+                  </a:lnTo>
+                  <a:lnTo>
+                    <a:pt x="3581126" y="798514"/>
+                  </a:lnTo>
+                  <a:lnTo>
+                    <a:pt x="3652748" y="786807"/>
+                  </a:lnTo>
+                  <a:lnTo>
+                    <a:pt x="3724371" y="774946"/>
+                  </a:lnTo>
+                  <a:lnTo>
+                    <a:pt x="3795993" y="762928"/>
+                  </a:lnTo>
+                  <a:lnTo>
+                    <a:pt x="3867616" y="750753"/>
+                  </a:lnTo>
+                  <a:lnTo>
+                    <a:pt x="3939238" y="738417"/>
+                  </a:lnTo>
+                  <a:lnTo>
+                    <a:pt x="4010861" y="725919"/>
+                  </a:lnTo>
+                  <a:lnTo>
+                    <a:pt x="4082483" y="713257"/>
+                  </a:lnTo>
+                  <a:lnTo>
+                    <a:pt x="4154106" y="700428"/>
+                  </a:lnTo>
+                  <a:lnTo>
+                    <a:pt x="4225729" y="687430"/>
+                  </a:lnTo>
+                  <a:lnTo>
+                    <a:pt x="4297351" y="674262"/>
+                  </a:lnTo>
+                  <a:lnTo>
+                    <a:pt x="4368974" y="660920"/>
+                  </a:lnTo>
+                  <a:lnTo>
+                    <a:pt x="4440596" y="647402"/>
+                  </a:lnTo>
+                  <a:lnTo>
+                    <a:pt x="4512219" y="633707"/>
+                  </a:lnTo>
+                  <a:lnTo>
+                    <a:pt x="4583841" y="619831"/>
+                  </a:lnTo>
+                  <a:lnTo>
+                    <a:pt x="4655464" y="605773"/>
+                  </a:lnTo>
+                  <a:lnTo>
+                    <a:pt x="4727086" y="591530"/>
+                  </a:lnTo>
+                  <a:lnTo>
+                    <a:pt x="4798709" y="577100"/>
+                  </a:lnTo>
+                  <a:lnTo>
+                    <a:pt x="4870331" y="562479"/>
+                  </a:lnTo>
+                  <a:lnTo>
+                    <a:pt x="4941954" y="547667"/>
+                  </a:lnTo>
+                  <a:lnTo>
+                    <a:pt x="5013576" y="532659"/>
+                  </a:lnTo>
+                  <a:lnTo>
+                    <a:pt x="5085199" y="517454"/>
+                  </a:lnTo>
+                  <a:lnTo>
+                    <a:pt x="5156821" y="502049"/>
+                  </a:lnTo>
+                  <a:lnTo>
+                    <a:pt x="5228444" y="486442"/>
+                  </a:lnTo>
+                  <a:lnTo>
+                    <a:pt x="5300066" y="470629"/>
+                  </a:lnTo>
+                  <a:lnTo>
+                    <a:pt x="5371689" y="454607"/>
+                  </a:lnTo>
+                  <a:lnTo>
+                    <a:pt x="5443311" y="438376"/>
+                  </a:lnTo>
+                  <a:lnTo>
+                    <a:pt x="5514934" y="421930"/>
+                  </a:lnTo>
+                  <a:lnTo>
+                    <a:pt x="5586557" y="405268"/>
+                  </a:lnTo>
+                  <a:lnTo>
+                    <a:pt x="5658179" y="388387"/>
+                  </a:lnTo>
+                  <a:lnTo>
+                    <a:pt x="5729802" y="371284"/>
+                  </a:lnTo>
+                  <a:lnTo>
+                    <a:pt x="5801424" y="353956"/>
+                  </a:lnTo>
+                  <a:lnTo>
+                    <a:pt x="5873047" y="336400"/>
+                  </a:lnTo>
+                  <a:lnTo>
+                    <a:pt x="5944669" y="318613"/>
+                  </a:lnTo>
+                  <a:lnTo>
+                    <a:pt x="6016292" y="300592"/>
+                  </a:lnTo>
+                  <a:lnTo>
+                    <a:pt x="6087914" y="282334"/>
+                  </a:lnTo>
+                  <a:lnTo>
+                    <a:pt x="6159537" y="263835"/>
+                  </a:lnTo>
+                  <a:lnTo>
+                    <a:pt x="6231159" y="245093"/>
+                  </a:lnTo>
+                  <a:lnTo>
+                    <a:pt x="6302782" y="226105"/>
+                  </a:lnTo>
+                  <a:lnTo>
+                    <a:pt x="6374404" y="206867"/>
+                  </a:lnTo>
+                  <a:lnTo>
+                    <a:pt x="6446027" y="187375"/>
+                  </a:lnTo>
+                  <a:lnTo>
+                    <a:pt x="6517649" y="167628"/>
+                  </a:lnTo>
+                  <a:lnTo>
+                    <a:pt x="6589272" y="147620"/>
+                  </a:lnTo>
+                  <a:lnTo>
+                    <a:pt x="6660894" y="127349"/>
+                  </a:lnTo>
+                  <a:lnTo>
+                    <a:pt x="6732517" y="106812"/>
+                  </a:lnTo>
+                  <a:lnTo>
+                    <a:pt x="6804139" y="86004"/>
+                  </a:lnTo>
+                  <a:lnTo>
+                    <a:pt x="6875762" y="64923"/>
+                  </a:lnTo>
+                  <a:lnTo>
+                    <a:pt x="6947385" y="43564"/>
+                  </a:lnTo>
+                  <a:lnTo>
+                    <a:pt x="7019007" y="21924"/>
                   </a:lnTo>
                   <a:lnTo>
                     <a:pt x="7090630" y="0"/>
@@ -4345,312 +4345,312 @@
           </p:nvSpPr>
           <p:spPr>
             <a:xfrm>
-              <a:off x="1172049" y="4732424"/>
-              <a:ext cx="7090630" cy="413396"/>
+              <a:off x="1172049" y="4731879"/>
+              <a:ext cx="7090630" cy="420314"/>
             </a:xfrm>
             <a:custGeom>
               <a:avLst/>
               <a:pathLst>
-                <a:path w="7090630" h="413396">
+                <a:path w="7090630" h="420314">
                   <a:moveTo>
-                    <a:pt x="7090630" y="413396"/>
+                    <a:pt x="7090630" y="420314"/>
                   </a:moveTo>
                   <a:lnTo>
-                    <a:pt x="7019007" y="408062"/>
-                  </a:lnTo>
-                  <a:lnTo>
-                    <a:pt x="6947385" y="402660"/>
-                  </a:lnTo>
-                  <a:lnTo>
-                    <a:pt x="6875762" y="397187"/>
-                  </a:lnTo>
-                  <a:lnTo>
-                    <a:pt x="6804139" y="391643"/>
-                  </a:lnTo>
-                  <a:lnTo>
-                    <a:pt x="6732517" y="386027"/>
-                  </a:lnTo>
-                  <a:lnTo>
-                    <a:pt x="6660894" y="380339"/>
-                  </a:lnTo>
-                  <a:lnTo>
-                    <a:pt x="6589272" y="374577"/>
-                  </a:lnTo>
-                  <a:lnTo>
-                    <a:pt x="6517649" y="368740"/>
-                  </a:lnTo>
-                  <a:lnTo>
-                    <a:pt x="6446027" y="362828"/>
-                  </a:lnTo>
-                  <a:lnTo>
-                    <a:pt x="6374404" y="356838"/>
-                  </a:lnTo>
-                  <a:lnTo>
-                    <a:pt x="6302782" y="350772"/>
-                  </a:lnTo>
-                  <a:lnTo>
-                    <a:pt x="6231159" y="344626"/>
-                  </a:lnTo>
-                  <a:lnTo>
-                    <a:pt x="6159537" y="338401"/>
-                  </a:lnTo>
-                  <a:lnTo>
-                    <a:pt x="6087914" y="332095"/>
-                  </a:lnTo>
-                  <a:lnTo>
-                    <a:pt x="6016292" y="325708"/>
-                  </a:lnTo>
-                  <a:lnTo>
-                    <a:pt x="5944669" y="319237"/>
-                  </a:lnTo>
-                  <a:lnTo>
-                    <a:pt x="5873047" y="312683"/>
-                  </a:lnTo>
-                  <a:lnTo>
-                    <a:pt x="5801424" y="306044"/>
-                  </a:lnTo>
-                  <a:lnTo>
-                    <a:pt x="5729802" y="299319"/>
-                  </a:lnTo>
-                  <a:lnTo>
-                    <a:pt x="5658179" y="292506"/>
-                  </a:lnTo>
-                  <a:lnTo>
-                    <a:pt x="5586557" y="285606"/>
-                  </a:lnTo>
-                  <a:lnTo>
-                    <a:pt x="5514934" y="278615"/>
-                  </a:lnTo>
-                  <a:lnTo>
-                    <a:pt x="5443311" y="271535"/>
-                  </a:lnTo>
-                  <a:lnTo>
-                    <a:pt x="5371689" y="264362"/>
-                  </a:lnTo>
-                  <a:lnTo>
-                    <a:pt x="5300066" y="257096"/>
-                  </a:lnTo>
-                  <a:lnTo>
-                    <a:pt x="5228444" y="249736"/>
-                  </a:lnTo>
-                  <a:lnTo>
-                    <a:pt x="5156821" y="242281"/>
-                  </a:lnTo>
-                  <a:lnTo>
-                    <a:pt x="5085199" y="234729"/>
-                  </a:lnTo>
-                  <a:lnTo>
-                    <a:pt x="5013576" y="227080"/>
-                  </a:lnTo>
-                  <a:lnTo>
-                    <a:pt x="4941954" y="219331"/>
-                  </a:lnTo>
-                  <a:lnTo>
-                    <a:pt x="4870331" y="211481"/>
-                  </a:lnTo>
-                  <a:lnTo>
-                    <a:pt x="4798709" y="203530"/>
-                  </a:lnTo>
-                  <a:lnTo>
-                    <a:pt x="4727086" y="195476"/>
-                  </a:lnTo>
-                  <a:lnTo>
-                    <a:pt x="4655464" y="187317"/>
-                  </a:lnTo>
-                  <a:lnTo>
-                    <a:pt x="4583841" y="179053"/>
-                  </a:lnTo>
-                  <a:lnTo>
-                    <a:pt x="4512219" y="170681"/>
-                  </a:lnTo>
-                  <a:lnTo>
-                    <a:pt x="4440596" y="162201"/>
-                  </a:lnTo>
-                  <a:lnTo>
-                    <a:pt x="4368974" y="153611"/>
-                  </a:lnTo>
-                  <a:lnTo>
-                    <a:pt x="4297351" y="144910"/>
-                  </a:lnTo>
-                  <a:lnTo>
-                    <a:pt x="4225729" y="136096"/>
-                  </a:lnTo>
-                  <a:lnTo>
-                    <a:pt x="4154106" y="127168"/>
-                  </a:lnTo>
-                  <a:lnTo>
-                    <a:pt x="4082483" y="118123"/>
-                  </a:lnTo>
-                  <a:lnTo>
-                    <a:pt x="4010861" y="108962"/>
-                  </a:lnTo>
-                  <a:lnTo>
-                    <a:pt x="3939238" y="99682"/>
-                  </a:lnTo>
-                  <a:lnTo>
-                    <a:pt x="3867616" y="90281"/>
-                  </a:lnTo>
-                  <a:lnTo>
-                    <a:pt x="3795993" y="80759"/>
-                  </a:lnTo>
-                  <a:lnTo>
-                    <a:pt x="3724371" y="71113"/>
-                  </a:lnTo>
-                  <a:lnTo>
-                    <a:pt x="3652748" y="61343"/>
-                  </a:lnTo>
-                  <a:lnTo>
-                    <a:pt x="3581126" y="51445"/>
-                  </a:lnTo>
-                  <a:lnTo>
-                    <a:pt x="3509503" y="41419"/>
-                  </a:lnTo>
-                  <a:lnTo>
-                    <a:pt x="3437881" y="31264"/>
-                  </a:lnTo>
-                  <a:lnTo>
-                    <a:pt x="3366258" y="20976"/>
-                  </a:lnTo>
-                  <a:lnTo>
-                    <a:pt x="3294636" y="10555"/>
+                    <a:pt x="7019007" y="414939"/>
+                  </a:lnTo>
+                  <a:lnTo>
+                    <a:pt x="6947385" y="409493"/>
+                  </a:lnTo>
+                  <a:lnTo>
+                    <a:pt x="6875762" y="403975"/>
+                  </a:lnTo>
+                  <a:lnTo>
+                    <a:pt x="6804139" y="398383"/>
+                  </a:lnTo>
+                  <a:lnTo>
+                    <a:pt x="6732517" y="392718"/>
+                  </a:lnTo>
+                  <a:lnTo>
+                    <a:pt x="6660894" y="386977"/>
+                  </a:lnTo>
+                  <a:lnTo>
+                    <a:pt x="6589272" y="381160"/>
+                  </a:lnTo>
+                  <a:lnTo>
+                    <a:pt x="6517649" y="375266"/>
+                  </a:lnTo>
+                  <a:lnTo>
+                    <a:pt x="6446027" y="369293"/>
+                  </a:lnTo>
+                  <a:lnTo>
+                    <a:pt x="6374404" y="363242"/>
+                  </a:lnTo>
+                  <a:lnTo>
+                    <a:pt x="6302782" y="357110"/>
+                  </a:lnTo>
+                  <a:lnTo>
+                    <a:pt x="6231159" y="350897"/>
+                  </a:lnTo>
+                  <a:lnTo>
+                    <a:pt x="6159537" y="344601"/>
+                  </a:lnTo>
+                  <a:lnTo>
+                    <a:pt x="6087914" y="338222"/>
+                  </a:lnTo>
+                  <a:lnTo>
+                    <a:pt x="6016292" y="331758"/>
+                  </a:lnTo>
+                  <a:lnTo>
+                    <a:pt x="5944669" y="325208"/>
+                  </a:lnTo>
+                  <a:lnTo>
+                    <a:pt x="5873047" y="318572"/>
+                  </a:lnTo>
+                  <a:lnTo>
+                    <a:pt x="5801424" y="311847"/>
+                  </a:lnTo>
+                  <a:lnTo>
+                    <a:pt x="5729802" y="305033"/>
+                  </a:lnTo>
+                  <a:lnTo>
+                    <a:pt x="5658179" y="298129"/>
+                  </a:lnTo>
+                  <a:lnTo>
+                    <a:pt x="5586557" y="291133"/>
+                  </a:lnTo>
+                  <a:lnTo>
+                    <a:pt x="5514934" y="284044"/>
+                  </a:lnTo>
+                  <a:lnTo>
+                    <a:pt x="5443311" y="276861"/>
+                  </a:lnTo>
+                  <a:lnTo>
+                    <a:pt x="5371689" y="269583"/>
+                  </a:lnTo>
+                  <a:lnTo>
+                    <a:pt x="5300066" y="262209"/>
+                  </a:lnTo>
+                  <a:lnTo>
+                    <a:pt x="5228444" y="254736"/>
+                  </a:lnTo>
+                  <a:lnTo>
+                    <a:pt x="5156821" y="247164"/>
+                  </a:lnTo>
+                  <a:lnTo>
+                    <a:pt x="5085199" y="239492"/>
+                  </a:lnTo>
+                  <a:lnTo>
+                    <a:pt x="5013576" y="231718"/>
+                  </a:lnTo>
+                  <a:lnTo>
+                    <a:pt x="4941954" y="223841"/>
+                  </a:lnTo>
+                  <a:lnTo>
+                    <a:pt x="4870331" y="215860"/>
+                  </a:lnTo>
+                  <a:lnTo>
+                    <a:pt x="4798709" y="207772"/>
+                  </a:lnTo>
+                  <a:lnTo>
+                    <a:pt x="4727086" y="199577"/>
+                  </a:lnTo>
+                  <a:lnTo>
+                    <a:pt x="4655464" y="191274"/>
+                  </a:lnTo>
+                  <a:lnTo>
+                    <a:pt x="4583841" y="182860"/>
+                  </a:lnTo>
+                  <a:lnTo>
+                    <a:pt x="4512219" y="174335"/>
+                  </a:lnTo>
+                  <a:lnTo>
+                    <a:pt x="4440596" y="165696"/>
+                  </a:lnTo>
+                  <a:lnTo>
+                    <a:pt x="4368974" y="156943"/>
+                  </a:lnTo>
+                  <a:lnTo>
+                    <a:pt x="4297351" y="148074"/>
+                  </a:lnTo>
+                  <a:lnTo>
+                    <a:pt x="4225729" y="139087"/>
+                  </a:lnTo>
+                  <a:lnTo>
+                    <a:pt x="4154106" y="129981"/>
+                  </a:lnTo>
+                  <a:lnTo>
+                    <a:pt x="4082483" y="120754"/>
+                  </a:lnTo>
+                  <a:lnTo>
+                    <a:pt x="4010861" y="111404"/>
+                  </a:lnTo>
+                  <a:lnTo>
+                    <a:pt x="3939238" y="101931"/>
+                  </a:lnTo>
+                  <a:lnTo>
+                    <a:pt x="3867616" y="92332"/>
+                  </a:lnTo>
+                  <a:lnTo>
+                    <a:pt x="3795993" y="82605"/>
+                  </a:lnTo>
+                  <a:lnTo>
+                    <a:pt x="3724371" y="72749"/>
+                  </a:lnTo>
+                  <a:lnTo>
+                    <a:pt x="3652748" y="62763"/>
+                  </a:lnTo>
+                  <a:lnTo>
+                    <a:pt x="3581126" y="52644"/>
+                  </a:lnTo>
+                  <a:lnTo>
+                    <a:pt x="3509503" y="42391"/>
+                  </a:lnTo>
+                  <a:lnTo>
+                    <a:pt x="3437881" y="32002"/>
+                  </a:lnTo>
+                  <a:lnTo>
+                    <a:pt x="3366258" y="21475"/>
+                  </a:lnTo>
+                  <a:lnTo>
+                    <a:pt x="3294636" y="10808"/>
                   </a:lnTo>
                   <a:lnTo>
                     <a:pt x="3223013" y="0"/>
                   </a:lnTo>
                   <a:lnTo>
-                    <a:pt x="3151391" y="1738"/>
-                  </a:lnTo>
-                  <a:lnTo>
-                    <a:pt x="3079768" y="12909"/>
-                  </a:lnTo>
-                  <a:lnTo>
-                    <a:pt x="3008146" y="23929"/>
-                  </a:lnTo>
-                  <a:lnTo>
-                    <a:pt x="2936523" y="34800"/>
-                  </a:lnTo>
-                  <a:lnTo>
-                    <a:pt x="2864901" y="45523"/>
-                  </a:lnTo>
-                  <a:lnTo>
-                    <a:pt x="2793278" y="56100"/>
-                  </a:lnTo>
-                  <a:lnTo>
-                    <a:pt x="2721655" y="66534"/>
-                  </a:lnTo>
-                  <a:lnTo>
-                    <a:pt x="2650033" y="76827"/>
-                  </a:lnTo>
-                  <a:lnTo>
-                    <a:pt x="2578410" y="86979"/>
-                  </a:lnTo>
-                  <a:lnTo>
-                    <a:pt x="2506788" y="96994"/>
-                  </a:lnTo>
-                  <a:lnTo>
-                    <a:pt x="2435165" y="106873"/>
-                  </a:lnTo>
-                  <a:lnTo>
-                    <a:pt x="2363543" y="116618"/>
-                  </a:lnTo>
-                  <a:lnTo>
-                    <a:pt x="2291920" y="126230"/>
-                  </a:lnTo>
-                  <a:lnTo>
-                    <a:pt x="2220298" y="135712"/>
-                  </a:lnTo>
-                  <a:lnTo>
-                    <a:pt x="2148675" y="145065"/>
-                  </a:lnTo>
-                  <a:lnTo>
-                    <a:pt x="2077053" y="154292"/>
-                  </a:lnTo>
-                  <a:lnTo>
-                    <a:pt x="2005430" y="163393"/>
-                  </a:lnTo>
-                  <a:lnTo>
-                    <a:pt x="1933808" y="172371"/>
-                  </a:lnTo>
-                  <a:lnTo>
-                    <a:pt x="1862185" y="181226"/>
-                  </a:lnTo>
-                  <a:lnTo>
-                    <a:pt x="1790563" y="189962"/>
-                  </a:lnTo>
-                  <a:lnTo>
-                    <a:pt x="1718940" y="198579"/>
-                  </a:lnTo>
-                  <a:lnTo>
-                    <a:pt x="1647318" y="207079"/>
-                  </a:lnTo>
-                  <a:lnTo>
-                    <a:pt x="1575695" y="215463"/>
-                  </a:lnTo>
-                  <a:lnTo>
-                    <a:pt x="1504073" y="223734"/>
-                  </a:lnTo>
-                  <a:lnTo>
-                    <a:pt x="1432450" y="231893"/>
-                  </a:lnTo>
-                  <a:lnTo>
-                    <a:pt x="1360827" y="239941"/>
-                  </a:lnTo>
-                  <a:lnTo>
-                    <a:pt x="1289205" y="247879"/>
-                  </a:lnTo>
-                  <a:lnTo>
-                    <a:pt x="1217582" y="255710"/>
-                  </a:lnTo>
-                  <a:lnTo>
-                    <a:pt x="1145960" y="263435"/>
-                  </a:lnTo>
-                  <a:lnTo>
-                    <a:pt x="1074337" y="271055"/>
-                  </a:lnTo>
-                  <a:lnTo>
-                    <a:pt x="1002715" y="278571"/>
-                  </a:lnTo>
-                  <a:lnTo>
-                    <a:pt x="931092" y="285985"/>
-                  </a:lnTo>
-                  <a:lnTo>
-                    <a:pt x="859470" y="293299"/>
-                  </a:lnTo>
-                  <a:lnTo>
-                    <a:pt x="787847" y="300513"/>
-                  </a:lnTo>
-                  <a:lnTo>
-                    <a:pt x="716225" y="307630"/>
-                  </a:lnTo>
-                  <a:lnTo>
-                    <a:pt x="644602" y="314650"/>
-                  </a:lnTo>
-                  <a:lnTo>
-                    <a:pt x="572980" y="321574"/>
-                  </a:lnTo>
-                  <a:lnTo>
-                    <a:pt x="501357" y="328405"/>
-                  </a:lnTo>
-                  <a:lnTo>
-                    <a:pt x="429735" y="335143"/>
-                  </a:lnTo>
-                  <a:lnTo>
-                    <a:pt x="358112" y="341789"/>
-                  </a:lnTo>
-                  <a:lnTo>
-                    <a:pt x="286490" y="348345"/>
-                  </a:lnTo>
-                  <a:lnTo>
-                    <a:pt x="214867" y="354813"/>
-                  </a:lnTo>
-                  <a:lnTo>
-                    <a:pt x="143245" y="361192"/>
-                  </a:lnTo>
-                  <a:lnTo>
-                    <a:pt x="71622" y="367485"/>
-                  </a:lnTo>
-                  <a:lnTo>
-                    <a:pt x="0" y="373693"/>
+                    <a:pt x="3151391" y="2652"/>
+                  </a:lnTo>
+                  <a:lnTo>
+                    <a:pt x="3079768" y="13336"/>
+                  </a:lnTo>
+                  <a:lnTo>
+                    <a:pt x="3008146" y="23881"/>
+                  </a:lnTo>
+                  <a:lnTo>
+                    <a:pt x="2936523" y="34289"/>
+                  </a:lnTo>
+                  <a:lnTo>
+                    <a:pt x="2864901" y="44562"/>
+                  </a:lnTo>
+                  <a:lnTo>
+                    <a:pt x="2793278" y="54701"/>
+                  </a:lnTo>
+                  <a:lnTo>
+                    <a:pt x="2721655" y="64709"/>
+                  </a:lnTo>
+                  <a:lnTo>
+                    <a:pt x="2650033" y="74586"/>
+                  </a:lnTo>
+                  <a:lnTo>
+                    <a:pt x="2578410" y="84336"/>
+                  </a:lnTo>
+                  <a:lnTo>
+                    <a:pt x="2506788" y="93959"/>
+                  </a:lnTo>
+                  <a:lnTo>
+                    <a:pt x="2435165" y="103457"/>
+                  </a:lnTo>
+                  <a:lnTo>
+                    <a:pt x="2363543" y="112831"/>
+                  </a:lnTo>
+                  <a:lnTo>
+                    <a:pt x="2291920" y="122084"/>
+                  </a:lnTo>
+                  <a:lnTo>
+                    <a:pt x="2220298" y="131217"/>
+                  </a:lnTo>
+                  <a:lnTo>
+                    <a:pt x="2148675" y="140231"/>
+                  </a:lnTo>
+                  <a:lnTo>
+                    <a:pt x="2077053" y="149128"/>
+                  </a:lnTo>
+                  <a:lnTo>
+                    <a:pt x="2005430" y="157910"/>
+                  </a:lnTo>
+                  <a:lnTo>
+                    <a:pt x="1933808" y="166577"/>
+                  </a:lnTo>
+                  <a:lnTo>
+                    <a:pt x="1862185" y="175132"/>
+                  </a:lnTo>
+                  <a:lnTo>
+                    <a:pt x="1790563" y="183576"/>
+                  </a:lnTo>
+                  <a:lnTo>
+                    <a:pt x="1718940" y="191910"/>
+                  </a:lnTo>
+                  <a:lnTo>
+                    <a:pt x="1647318" y="200136"/>
+                  </a:lnTo>
+                  <a:lnTo>
+                    <a:pt x="1575695" y="208255"/>
+                  </a:lnTo>
+                  <a:lnTo>
+                    <a:pt x="1504073" y="216269"/>
+                  </a:lnTo>
+                  <a:lnTo>
+                    <a:pt x="1432450" y="224178"/>
+                  </a:lnTo>
+                  <a:lnTo>
+                    <a:pt x="1360827" y="231985"/>
+                  </a:lnTo>
+                  <a:lnTo>
+                    <a:pt x="1289205" y="239691"/>
+                  </a:lnTo>
+                  <a:lnTo>
+                    <a:pt x="1217582" y="247296"/>
+                  </a:lnTo>
+                  <a:lnTo>
+                    <a:pt x="1145960" y="254803"/>
+                  </a:lnTo>
+                  <a:lnTo>
+                    <a:pt x="1074337" y="262212"/>
+                  </a:lnTo>
+                  <a:lnTo>
+                    <a:pt x="1002715" y="269525"/>
+                  </a:lnTo>
+                  <a:lnTo>
+                    <a:pt x="931092" y="276743"/>
+                  </a:lnTo>
+                  <a:lnTo>
+                    <a:pt x="859470" y="283868"/>
+                  </a:lnTo>
+                  <a:lnTo>
+                    <a:pt x="787847" y="290900"/>
+                  </a:lnTo>
+                  <a:lnTo>
+                    <a:pt x="716225" y="297840"/>
+                  </a:lnTo>
+                  <a:lnTo>
+                    <a:pt x="644602" y="304691"/>
+                  </a:lnTo>
+                  <a:lnTo>
+                    <a:pt x="572980" y="311452"/>
+                  </a:lnTo>
+                  <a:lnTo>
+                    <a:pt x="501357" y="318126"/>
+                  </a:lnTo>
+                  <a:lnTo>
+                    <a:pt x="429735" y="324713"/>
+                  </a:lnTo>
+                  <a:lnTo>
+                    <a:pt x="358112" y="331214"/>
+                  </a:lnTo>
+                  <a:lnTo>
+                    <a:pt x="286490" y="337631"/>
+                  </a:lnTo>
+                  <a:lnTo>
+                    <a:pt x="214867" y="343965"/>
+                  </a:lnTo>
+                  <a:lnTo>
+                    <a:pt x="143245" y="350216"/>
+                  </a:lnTo>
+                  <a:lnTo>
+                    <a:pt x="71622" y="356386"/>
+                  </a:lnTo>
+                  <a:lnTo>
+                    <a:pt x="0" y="362476"/>
                   </a:lnTo>
                 </a:path>
               </a:pathLst>
@@ -4670,312 +4670,312 @@
           </p:nvSpPr>
           <p:spPr>
             <a:xfrm>
-              <a:off x="1172049" y="4709858"/>
-              <a:ext cx="7090630" cy="32322"/>
+              <a:off x="1172049" y="4725733"/>
+              <a:ext cx="7090630" cy="4547"/>
             </a:xfrm>
             <a:custGeom>
               <a:avLst/>
               <a:pathLst>
-                <a:path w="7090630" h="32322">
+                <a:path w="7090630" h="4547">
                   <a:moveTo>
-                    <a:pt x="0" y="32322"/>
+                    <a:pt x="0" y="0"/>
                   </a:moveTo>
                   <a:lnTo>
-                    <a:pt x="71622" y="32002"/>
-                  </a:lnTo>
-                  <a:lnTo>
-                    <a:pt x="143245" y="31681"/>
-                  </a:lnTo>
-                  <a:lnTo>
-                    <a:pt x="214867" y="31361"/>
-                  </a:lnTo>
-                  <a:lnTo>
-                    <a:pt x="286490" y="31040"/>
-                  </a:lnTo>
-                  <a:lnTo>
-                    <a:pt x="358112" y="30720"/>
-                  </a:lnTo>
-                  <a:lnTo>
-                    <a:pt x="429735" y="30399"/>
-                  </a:lnTo>
-                  <a:lnTo>
-                    <a:pt x="501357" y="30078"/>
-                  </a:lnTo>
-                  <a:lnTo>
-                    <a:pt x="572980" y="29757"/>
-                  </a:lnTo>
-                  <a:lnTo>
-                    <a:pt x="644602" y="29435"/>
-                  </a:lnTo>
-                  <a:lnTo>
-                    <a:pt x="716225" y="29114"/>
-                  </a:lnTo>
-                  <a:lnTo>
-                    <a:pt x="787847" y="28792"/>
-                  </a:lnTo>
-                  <a:lnTo>
-                    <a:pt x="859470" y="28471"/>
-                  </a:lnTo>
-                  <a:lnTo>
-                    <a:pt x="931092" y="28149"/>
-                  </a:lnTo>
-                  <a:lnTo>
-                    <a:pt x="1002715" y="27827"/>
-                  </a:lnTo>
-                  <a:lnTo>
-                    <a:pt x="1074337" y="27505"/>
-                  </a:lnTo>
-                  <a:lnTo>
-                    <a:pt x="1145960" y="27183"/>
-                  </a:lnTo>
-                  <a:lnTo>
-                    <a:pt x="1217582" y="26861"/>
-                  </a:lnTo>
-                  <a:lnTo>
-                    <a:pt x="1289205" y="26538"/>
-                  </a:lnTo>
-                  <a:lnTo>
-                    <a:pt x="1360827" y="26216"/>
-                  </a:lnTo>
-                  <a:lnTo>
-                    <a:pt x="1432450" y="25893"/>
-                  </a:lnTo>
-                  <a:lnTo>
-                    <a:pt x="1504073" y="25570"/>
-                  </a:lnTo>
-                  <a:lnTo>
-                    <a:pt x="1575695" y="25248"/>
-                  </a:lnTo>
-                  <a:lnTo>
-                    <a:pt x="1647318" y="24924"/>
-                  </a:lnTo>
-                  <a:lnTo>
-                    <a:pt x="1718940" y="24601"/>
-                  </a:lnTo>
-                  <a:lnTo>
-                    <a:pt x="1790563" y="24278"/>
-                  </a:lnTo>
-                  <a:lnTo>
-                    <a:pt x="1862185" y="23955"/>
-                  </a:lnTo>
-                  <a:lnTo>
-                    <a:pt x="1933808" y="23631"/>
-                  </a:lnTo>
-                  <a:lnTo>
-                    <a:pt x="2005430" y="23307"/>
-                  </a:lnTo>
-                  <a:lnTo>
-                    <a:pt x="2077053" y="22984"/>
-                  </a:lnTo>
-                  <a:lnTo>
-                    <a:pt x="2148675" y="22660"/>
-                  </a:lnTo>
-                  <a:lnTo>
-                    <a:pt x="2220298" y="22336"/>
-                  </a:lnTo>
-                  <a:lnTo>
-                    <a:pt x="2291920" y="22012"/>
-                  </a:lnTo>
-                  <a:lnTo>
-                    <a:pt x="2363543" y="21687"/>
-                  </a:lnTo>
-                  <a:lnTo>
-                    <a:pt x="2435165" y="21363"/>
-                  </a:lnTo>
-                  <a:lnTo>
-                    <a:pt x="2506788" y="21038"/>
-                  </a:lnTo>
-                  <a:lnTo>
-                    <a:pt x="2578410" y="20714"/>
-                  </a:lnTo>
-                  <a:lnTo>
-                    <a:pt x="2650033" y="20389"/>
-                  </a:lnTo>
-                  <a:lnTo>
-                    <a:pt x="2721655" y="20064"/>
-                  </a:lnTo>
-                  <a:lnTo>
-                    <a:pt x="2793278" y="19739"/>
-                  </a:lnTo>
-                  <a:lnTo>
-                    <a:pt x="2864901" y="19414"/>
-                  </a:lnTo>
-                  <a:lnTo>
-                    <a:pt x="2936523" y="19088"/>
-                  </a:lnTo>
-                  <a:lnTo>
-                    <a:pt x="3008146" y="18763"/>
-                  </a:lnTo>
-                  <a:lnTo>
-                    <a:pt x="3079768" y="18437"/>
-                  </a:lnTo>
-                  <a:lnTo>
-                    <a:pt x="3151391" y="18112"/>
-                  </a:lnTo>
-                  <a:lnTo>
-                    <a:pt x="3223013" y="17786"/>
-                  </a:lnTo>
-                  <a:lnTo>
-                    <a:pt x="3294636" y="17460"/>
-                  </a:lnTo>
-                  <a:lnTo>
-                    <a:pt x="3366258" y="17134"/>
-                  </a:lnTo>
-                  <a:lnTo>
-                    <a:pt x="3437881" y="16807"/>
-                  </a:lnTo>
-                  <a:lnTo>
-                    <a:pt x="3509503" y="16481"/>
-                  </a:lnTo>
-                  <a:lnTo>
-                    <a:pt x="3581126" y="16155"/>
-                  </a:lnTo>
-                  <a:lnTo>
-                    <a:pt x="3652748" y="15828"/>
-                  </a:lnTo>
-                  <a:lnTo>
-                    <a:pt x="3724371" y="15501"/>
-                  </a:lnTo>
-                  <a:lnTo>
-                    <a:pt x="3795993" y="15174"/>
-                  </a:lnTo>
-                  <a:lnTo>
-                    <a:pt x="3867616" y="14847"/>
-                  </a:lnTo>
-                  <a:lnTo>
-                    <a:pt x="3939238" y="14520"/>
-                  </a:lnTo>
-                  <a:lnTo>
-                    <a:pt x="4010861" y="14193"/>
-                  </a:lnTo>
-                  <a:lnTo>
-                    <a:pt x="4082483" y="13866"/>
-                  </a:lnTo>
-                  <a:lnTo>
-                    <a:pt x="4154106" y="13538"/>
-                  </a:lnTo>
-                  <a:lnTo>
-                    <a:pt x="4225729" y="13211"/>
-                  </a:lnTo>
-                  <a:lnTo>
-                    <a:pt x="4297351" y="12883"/>
-                  </a:lnTo>
-                  <a:lnTo>
-                    <a:pt x="4368974" y="12555"/>
-                  </a:lnTo>
-                  <a:lnTo>
-                    <a:pt x="4440596" y="12227"/>
-                  </a:lnTo>
-                  <a:lnTo>
-                    <a:pt x="4512219" y="11899"/>
-                  </a:lnTo>
-                  <a:lnTo>
-                    <a:pt x="4583841" y="11571"/>
-                  </a:lnTo>
-                  <a:lnTo>
-                    <a:pt x="4655464" y="11242"/>
-                  </a:lnTo>
-                  <a:lnTo>
-                    <a:pt x="4727086" y="10914"/>
-                  </a:lnTo>
-                  <a:lnTo>
-                    <a:pt x="4798709" y="10585"/>
-                  </a:lnTo>
-                  <a:lnTo>
-                    <a:pt x="4870331" y="10256"/>
-                  </a:lnTo>
-                  <a:lnTo>
-                    <a:pt x="4941954" y="9927"/>
-                  </a:lnTo>
-                  <a:lnTo>
-                    <a:pt x="5013576" y="9598"/>
-                  </a:lnTo>
-                  <a:lnTo>
-                    <a:pt x="5085199" y="9269"/>
-                  </a:lnTo>
-                  <a:lnTo>
-                    <a:pt x="5156821" y="8940"/>
-                  </a:lnTo>
-                  <a:lnTo>
-                    <a:pt x="5228444" y="8610"/>
-                  </a:lnTo>
-                  <a:lnTo>
-                    <a:pt x="5300066" y="8281"/>
-                  </a:lnTo>
-                  <a:lnTo>
-                    <a:pt x="5371689" y="7951"/>
-                  </a:lnTo>
-                  <a:lnTo>
-                    <a:pt x="5443311" y="7621"/>
-                  </a:lnTo>
-                  <a:lnTo>
-                    <a:pt x="5514934" y="7291"/>
-                  </a:lnTo>
-                  <a:lnTo>
-                    <a:pt x="5586557" y="6961"/>
-                  </a:lnTo>
-                  <a:lnTo>
-                    <a:pt x="5658179" y="6631"/>
-                  </a:lnTo>
-                  <a:lnTo>
-                    <a:pt x="5729802" y="6301"/>
-                  </a:lnTo>
-                  <a:lnTo>
-                    <a:pt x="5801424" y="5970"/>
-                  </a:lnTo>
-                  <a:lnTo>
-                    <a:pt x="5873047" y="5640"/>
-                  </a:lnTo>
-                  <a:lnTo>
-                    <a:pt x="5944669" y="5309"/>
-                  </a:lnTo>
-                  <a:lnTo>
-                    <a:pt x="6016292" y="4978"/>
-                  </a:lnTo>
-                  <a:lnTo>
-                    <a:pt x="6087914" y="4647"/>
-                  </a:lnTo>
-                  <a:lnTo>
-                    <a:pt x="6159537" y="4316"/>
-                  </a:lnTo>
-                  <a:lnTo>
-                    <a:pt x="6231159" y="3985"/>
-                  </a:lnTo>
-                  <a:lnTo>
-                    <a:pt x="6302782" y="3653"/>
-                  </a:lnTo>
-                  <a:lnTo>
-                    <a:pt x="6374404" y="3322"/>
-                  </a:lnTo>
-                  <a:lnTo>
-                    <a:pt x="6446027" y="2990"/>
-                  </a:lnTo>
-                  <a:lnTo>
-                    <a:pt x="6517649" y="2658"/>
-                  </a:lnTo>
-                  <a:lnTo>
-                    <a:pt x="6589272" y="2326"/>
-                  </a:lnTo>
-                  <a:lnTo>
-                    <a:pt x="6660894" y="1994"/>
-                  </a:lnTo>
-                  <a:lnTo>
-                    <a:pt x="6732517" y="1662"/>
-                  </a:lnTo>
-                  <a:lnTo>
-                    <a:pt x="6804139" y="1330"/>
-                  </a:lnTo>
-                  <a:lnTo>
-                    <a:pt x="6875762" y="998"/>
-                  </a:lnTo>
-                  <a:lnTo>
-                    <a:pt x="6947385" y="665"/>
-                  </a:lnTo>
-                  <a:lnTo>
-                    <a:pt x="7019007" y="332"/>
-                  </a:lnTo>
-                  <a:lnTo>
-                    <a:pt x="7090630" y="0"/>
+                    <a:pt x="71622" y="46"/>
+                  </a:lnTo>
+                  <a:lnTo>
+                    <a:pt x="143245" y="92"/>
+                  </a:lnTo>
+                  <a:lnTo>
+                    <a:pt x="214867" y="138"/>
+                  </a:lnTo>
+                  <a:lnTo>
+                    <a:pt x="286490" y="184"/>
+                  </a:lnTo>
+                  <a:lnTo>
+                    <a:pt x="358112" y="230"/>
+                  </a:lnTo>
+                  <a:lnTo>
+                    <a:pt x="429735" y="276"/>
+                  </a:lnTo>
+                  <a:lnTo>
+                    <a:pt x="501357" y="322"/>
+                  </a:lnTo>
+                  <a:lnTo>
+                    <a:pt x="572980" y="368"/>
+                  </a:lnTo>
+                  <a:lnTo>
+                    <a:pt x="644602" y="414"/>
+                  </a:lnTo>
+                  <a:lnTo>
+                    <a:pt x="716225" y="460"/>
+                  </a:lnTo>
+                  <a:lnTo>
+                    <a:pt x="787847" y="506"/>
+                  </a:lnTo>
+                  <a:lnTo>
+                    <a:pt x="859470" y="552"/>
+                  </a:lnTo>
+                  <a:lnTo>
+                    <a:pt x="931092" y="598"/>
+                  </a:lnTo>
+                  <a:lnTo>
+                    <a:pt x="1002715" y="644"/>
+                  </a:lnTo>
+                  <a:lnTo>
+                    <a:pt x="1074337" y="690"/>
+                  </a:lnTo>
+                  <a:lnTo>
+                    <a:pt x="1145960" y="736"/>
+                  </a:lnTo>
+                  <a:lnTo>
+                    <a:pt x="1217582" y="782"/>
+                  </a:lnTo>
+                  <a:lnTo>
+                    <a:pt x="1289205" y="828"/>
+                  </a:lnTo>
+                  <a:lnTo>
+                    <a:pt x="1360827" y="874"/>
+                  </a:lnTo>
+                  <a:lnTo>
+                    <a:pt x="1432450" y="920"/>
+                  </a:lnTo>
+                  <a:lnTo>
+                    <a:pt x="1504073" y="966"/>
+                  </a:lnTo>
+                  <a:lnTo>
+                    <a:pt x="1575695" y="1012"/>
+                  </a:lnTo>
+                  <a:lnTo>
+                    <a:pt x="1647318" y="1058"/>
+                  </a:lnTo>
+                  <a:lnTo>
+                    <a:pt x="1718940" y="1104"/>
+                  </a:lnTo>
+                  <a:lnTo>
+                    <a:pt x="1790563" y="1150"/>
+                  </a:lnTo>
+                  <a:lnTo>
+                    <a:pt x="1862185" y="1196"/>
+                  </a:lnTo>
+                  <a:lnTo>
+                    <a:pt x="1933808" y="1242"/>
+                  </a:lnTo>
+                  <a:lnTo>
+                    <a:pt x="2005430" y="1288"/>
+                  </a:lnTo>
+                  <a:lnTo>
+                    <a:pt x="2077053" y="1334"/>
+                  </a:lnTo>
+                  <a:lnTo>
+                    <a:pt x="2148675" y="1380"/>
+                  </a:lnTo>
+                  <a:lnTo>
+                    <a:pt x="2220298" y="1426"/>
+                  </a:lnTo>
+                  <a:lnTo>
+                    <a:pt x="2291920" y="1472"/>
+                  </a:lnTo>
+                  <a:lnTo>
+                    <a:pt x="2363543" y="1518"/>
+                  </a:lnTo>
+                  <a:lnTo>
+                    <a:pt x="2435165" y="1564"/>
+                  </a:lnTo>
+                  <a:lnTo>
+                    <a:pt x="2506788" y="1610"/>
+                  </a:lnTo>
+                  <a:lnTo>
+                    <a:pt x="2578410" y="1656"/>
+                  </a:lnTo>
+                  <a:lnTo>
+                    <a:pt x="2650033" y="1702"/>
+                  </a:lnTo>
+                  <a:lnTo>
+                    <a:pt x="2721655" y="1748"/>
+                  </a:lnTo>
+                  <a:lnTo>
+                    <a:pt x="2793278" y="1794"/>
+                  </a:lnTo>
+                  <a:lnTo>
+                    <a:pt x="2864901" y="1840"/>
+                  </a:lnTo>
+                  <a:lnTo>
+                    <a:pt x="2936523" y="1886"/>
+                  </a:lnTo>
+                  <a:lnTo>
+                    <a:pt x="3008146" y="1932"/>
+                  </a:lnTo>
+                  <a:lnTo>
+                    <a:pt x="3079768" y="1978"/>
+                  </a:lnTo>
+                  <a:lnTo>
+                    <a:pt x="3151391" y="2024"/>
+                  </a:lnTo>
+                  <a:lnTo>
+                    <a:pt x="3223013" y="2069"/>
+                  </a:lnTo>
+                  <a:lnTo>
+                    <a:pt x="3294636" y="2115"/>
+                  </a:lnTo>
+                  <a:lnTo>
+                    <a:pt x="3366258" y="2161"/>
+                  </a:lnTo>
+                  <a:lnTo>
+                    <a:pt x="3437881" y="2207"/>
+                  </a:lnTo>
+                  <a:lnTo>
+                    <a:pt x="3509503" y="2253"/>
+                  </a:lnTo>
+                  <a:lnTo>
+                    <a:pt x="3581126" y="2299"/>
+                  </a:lnTo>
+                  <a:lnTo>
+                    <a:pt x="3652748" y="2345"/>
+                  </a:lnTo>
+                  <a:lnTo>
+                    <a:pt x="3724371" y="2391"/>
+                  </a:lnTo>
+                  <a:lnTo>
+                    <a:pt x="3795993" y="2437"/>
+                  </a:lnTo>
+                  <a:lnTo>
+                    <a:pt x="3867616" y="2483"/>
+                  </a:lnTo>
+                  <a:lnTo>
+                    <a:pt x="3939238" y="2529"/>
+                  </a:lnTo>
+                  <a:lnTo>
+                    <a:pt x="4010861" y="2575"/>
+                  </a:lnTo>
+                  <a:lnTo>
+                    <a:pt x="4082483" y="2621"/>
+                  </a:lnTo>
+                  <a:lnTo>
+                    <a:pt x="4154106" y="2666"/>
+                  </a:lnTo>
+                  <a:lnTo>
+                    <a:pt x="4225729" y="2712"/>
+                  </a:lnTo>
+                  <a:lnTo>
+                    <a:pt x="4297351" y="2758"/>
+                  </a:lnTo>
+                  <a:lnTo>
+                    <a:pt x="4368974" y="2804"/>
+                  </a:lnTo>
+                  <a:lnTo>
+                    <a:pt x="4440596" y="2850"/>
+                  </a:lnTo>
+                  <a:lnTo>
+                    <a:pt x="4512219" y="2896"/>
+                  </a:lnTo>
+                  <a:lnTo>
+                    <a:pt x="4583841" y="2942"/>
+                  </a:lnTo>
+                  <a:lnTo>
+                    <a:pt x="4655464" y="2988"/>
+                  </a:lnTo>
+                  <a:lnTo>
+                    <a:pt x="4727086" y="3034"/>
+                  </a:lnTo>
+                  <a:lnTo>
+                    <a:pt x="4798709" y="3080"/>
+                  </a:lnTo>
+                  <a:lnTo>
+                    <a:pt x="4870331" y="3125"/>
+                  </a:lnTo>
+                  <a:lnTo>
+                    <a:pt x="4941954" y="3171"/>
+                  </a:lnTo>
+                  <a:lnTo>
+                    <a:pt x="5013576" y="3217"/>
+                  </a:lnTo>
+                  <a:lnTo>
+                    <a:pt x="5085199" y="3263"/>
+                  </a:lnTo>
+                  <a:lnTo>
+                    <a:pt x="5156821" y="3309"/>
+                  </a:lnTo>
+                  <a:lnTo>
+                    <a:pt x="5228444" y="3355"/>
+                  </a:lnTo>
+                  <a:lnTo>
+                    <a:pt x="5300066" y="3401"/>
+                  </a:lnTo>
+                  <a:lnTo>
+                    <a:pt x="5371689" y="3447"/>
+                  </a:lnTo>
+                  <a:lnTo>
+                    <a:pt x="5443311" y="3492"/>
+                  </a:lnTo>
+                  <a:lnTo>
+                    <a:pt x="5514934" y="3538"/>
+                  </a:lnTo>
+                  <a:lnTo>
+                    <a:pt x="5586557" y="3584"/>
+                  </a:lnTo>
+                  <a:lnTo>
+                    <a:pt x="5658179" y="3630"/>
+                  </a:lnTo>
+                  <a:lnTo>
+                    <a:pt x="5729802" y="3676"/>
+                  </a:lnTo>
+                  <a:lnTo>
+                    <a:pt x="5801424" y="3722"/>
+                  </a:lnTo>
+                  <a:lnTo>
+                    <a:pt x="5873047" y="3768"/>
+                  </a:lnTo>
+                  <a:lnTo>
+                    <a:pt x="5944669" y="3813"/>
+                  </a:lnTo>
+                  <a:lnTo>
+                    <a:pt x="6016292" y="3859"/>
+                  </a:lnTo>
+                  <a:lnTo>
+                    <a:pt x="6087914" y="3905"/>
+                  </a:lnTo>
+                  <a:lnTo>
+                    <a:pt x="6159537" y="3951"/>
+                  </a:lnTo>
+                  <a:lnTo>
+                    <a:pt x="6231159" y="3997"/>
+                  </a:lnTo>
+                  <a:lnTo>
+                    <a:pt x="6302782" y="4043"/>
+                  </a:lnTo>
+                  <a:lnTo>
+                    <a:pt x="6374404" y="4088"/>
+                  </a:lnTo>
+                  <a:lnTo>
+                    <a:pt x="6446027" y="4134"/>
+                  </a:lnTo>
+                  <a:lnTo>
+                    <a:pt x="6517649" y="4180"/>
+                  </a:lnTo>
+                  <a:lnTo>
+                    <a:pt x="6589272" y="4226"/>
+                  </a:lnTo>
+                  <a:lnTo>
+                    <a:pt x="6660894" y="4272"/>
+                  </a:lnTo>
+                  <a:lnTo>
+                    <a:pt x="6732517" y="4318"/>
+                  </a:lnTo>
+                  <a:lnTo>
+                    <a:pt x="6804139" y="4363"/>
+                  </a:lnTo>
+                  <a:lnTo>
+                    <a:pt x="6875762" y="4409"/>
+                  </a:lnTo>
+                  <a:lnTo>
+                    <a:pt x="6947385" y="4455"/>
+                  </a:lnTo>
+                  <a:lnTo>
+                    <a:pt x="7019007" y="4501"/>
+                  </a:lnTo>
+                  <a:lnTo>
+                    <a:pt x="7090630" y="4547"/>
                   </a:lnTo>
                 </a:path>
               </a:pathLst>
@@ -5047,7 +5047,7 @@
           </p:nvSpPr>
           <p:spPr>
             <a:xfrm>
-              <a:off x="4363883" y="2073503"/>
+              <a:off x="4368185" y="2073503"/>
               <a:ext cx="0" cy="3649639"/>
             </a:xfrm>
             <a:custGeom>
@@ -5090,7 +5090,7 @@
           </p:nvSpPr>
           <p:spPr>
             <a:xfrm>
-              <a:off x="3178931" y="2073503"/>
+              <a:off x="3176242" y="2073503"/>
               <a:ext cx="0" cy="3649639"/>
             </a:xfrm>
             <a:custGeom>
@@ -5133,7 +5133,7 @@
           </p:nvSpPr>
           <p:spPr>
             <a:xfrm>
-              <a:off x="5373904" y="2073503"/>
+              <a:off x="5386913" y="2073503"/>
               <a:ext cx="0" cy="3649639"/>
             </a:xfrm>
             <a:custGeom>
@@ -5406,7 +5406,7 @@
           </p:nvSpPr>
           <p:spPr>
             <a:xfrm>
-              <a:off x="1536080" y="5785772"/>
+              <a:off x="1536741" y="5785772"/>
               <a:ext cx="161574" cy="80101"/>
             </a:xfrm>
             <a:prstGeom prst="rect">
@@ -5452,7 +5452,7 @@
           </p:nvSpPr>
           <p:spPr>
             <a:xfrm>
-              <a:off x="2439408" y="5785772"/>
+              <a:off x="2439256" y="5785772"/>
               <a:ext cx="161574" cy="80101"/>
             </a:xfrm>
             <a:prstGeom prst="rect">
@@ -5498,7 +5498,7 @@
           </p:nvSpPr>
           <p:spPr>
             <a:xfrm>
-              <a:off x="3342736" y="5785772"/>
+              <a:off x="3341771" y="5785772"/>
               <a:ext cx="161574" cy="80101"/>
             </a:xfrm>
             <a:prstGeom prst="rect">
@@ -5544,7 +5544,7 @@
           </p:nvSpPr>
           <p:spPr>
             <a:xfrm>
-              <a:off x="4246063" y="5785772"/>
+              <a:off x="4244287" y="5785772"/>
               <a:ext cx="161574" cy="80101"/>
             </a:xfrm>
             <a:prstGeom prst="rect">
@@ -5590,7 +5590,7 @@
           </p:nvSpPr>
           <p:spPr>
             <a:xfrm>
-              <a:off x="5199088" y="5785772"/>
+              <a:off x="5196500" y="5785772"/>
               <a:ext cx="62179" cy="80101"/>
             </a:xfrm>
             <a:prstGeom prst="rect">
@@ -5636,7 +5636,7 @@
           </p:nvSpPr>
           <p:spPr>
             <a:xfrm>
-              <a:off x="6071326" y="5785772"/>
+              <a:off x="6067926" y="5785772"/>
               <a:ext cx="124358" cy="80101"/>
             </a:xfrm>
             <a:prstGeom prst="rect">
@@ -5682,7 +5682,7 @@
           </p:nvSpPr>
           <p:spPr>
             <a:xfrm>
-              <a:off x="6974654" y="5785772"/>
+              <a:off x="6970441" y="5785772"/>
               <a:ext cx="124358" cy="80101"/>
             </a:xfrm>
             <a:prstGeom prst="rect">
@@ -5728,7 +5728,7 @@
           </p:nvSpPr>
           <p:spPr>
             <a:xfrm>
-              <a:off x="7877981" y="5785772"/>
+              <a:off x="7872957" y="5785772"/>
               <a:ext cx="124358" cy="80101"/>
             </a:xfrm>
             <a:prstGeom prst="rect">
@@ -5899,7 +5899,7 @@
                   <a:latin typeface="Helvetica"/>
                   <a:cs typeface="Helvetica"/>
                 </a:rPr>
-                <a:t>subHR per 10 % decline: 1.00 (0.84-1.18), p_Bonf = 1.000 (n = 6)  |  per IQR decline (Δ = 24.3 %): 0.99 (0.66-1.48)  |  IQR: [-22.7, 1.6] %</a:t>
+                <a:t>subHR per 10 % decline: 1.00 (0.85-1.18), p_Bonf = 1.000 (n = 6)  |  per IQR decline (Δ = 24.5 %): 1.00 (0.67-1.50)  |  IQR: [-22.7, 1.8] %</a:t>
               </a:r>
             </a:p>
           </p:txBody>
